--- a/Update_Slides/FYP_Weekly_Update_Slides_Muon_Analysis.pptx
+++ b/Update_Slides/FYP_Weekly_Update_Slides_Muon_Analysis.pptx
@@ -5,20 +5,21 @@
     <p:sldMasterId id="2147483690" r:id="rId1"/>
   </p:sldMasterIdLst>
   <p:notesMasterIdLst>
-    <p:notesMasterId r:id="rId13"/>
+    <p:notesMasterId r:id="rId14"/>
   </p:notesMasterIdLst>
   <p:sldIdLst>
     <p:sldId id="371" r:id="rId2"/>
     <p:sldId id="416" r:id="rId3"/>
-    <p:sldId id="411" r:id="rId4"/>
-    <p:sldId id="415" r:id="rId5"/>
-    <p:sldId id="418" r:id="rId6"/>
-    <p:sldId id="412" r:id="rId7"/>
-    <p:sldId id="414" r:id="rId8"/>
+    <p:sldId id="423" r:id="rId4"/>
+    <p:sldId id="424" r:id="rId5"/>
+    <p:sldId id="425" r:id="rId6"/>
+    <p:sldId id="426" r:id="rId7"/>
+    <p:sldId id="427" r:id="rId8"/>
     <p:sldId id="419" r:id="rId9"/>
-    <p:sldId id="420" r:id="rId10"/>
-    <p:sldId id="421" r:id="rId11"/>
-    <p:sldId id="422" r:id="rId12"/>
+    <p:sldId id="428" r:id="rId10"/>
+    <p:sldId id="431" r:id="rId11"/>
+    <p:sldId id="430" r:id="rId12"/>
+    <p:sldId id="429" r:id="rId13"/>
   </p:sldIdLst>
   <p:sldSz cx="12192000" cy="6858000"/>
   <p:notesSz cx="6858000" cy="9144000"/>
@@ -207,7 +208,7 @@
           <a:p>
             <a:fld id="{C03BD9BC-DEF3-4382-83D6-5C0A0444C18A}" type="datetimeFigureOut">
               <a:rPr lang="en-SG" smtClean="0"/>
-              <a:t>23/3/2026</a:t>
+              <a:t>26/3/2026</a:t>
             </a:fld>
             <a:endParaRPr lang="en-SG"/>
           </a:p>
@@ -715,7 +716,7 @@
           <a:p>
             <a:fld id="{0EAFE32E-95B7-4367-9495-9CBC389572F3}" type="datetimeFigureOut">
               <a:rPr lang="en-SG" smtClean="0"/>
-              <a:t>23/3/2026</a:t>
+              <a:t>26/3/2026</a:t>
             </a:fld>
             <a:endParaRPr lang="en-SG"/>
           </a:p>
@@ -923,7 +924,7 @@
           <a:p>
             <a:fld id="{0EAFE32E-95B7-4367-9495-9CBC389572F3}" type="datetimeFigureOut">
               <a:rPr lang="en-SG" smtClean="0"/>
-              <a:t>23/3/2026</a:t>
+              <a:t>26/3/2026</a:t>
             </a:fld>
             <a:endParaRPr lang="en-SG"/>
           </a:p>
@@ -1179,7 +1180,7 @@
           <a:p>
             <a:fld id="{0EAFE32E-95B7-4367-9495-9CBC389572F3}" type="datetimeFigureOut">
               <a:rPr lang="en-SG" smtClean="0"/>
-              <a:t>23/3/2026</a:t>
+              <a:t>26/3/2026</a:t>
             </a:fld>
             <a:endParaRPr lang="en-SG"/>
           </a:p>
@@ -1353,7 +1354,7 @@
           <a:p>
             <a:fld id="{0EAFE32E-95B7-4367-9495-9CBC389572F3}" type="datetimeFigureOut">
               <a:rPr lang="en-SG" smtClean="0"/>
-              <a:t>23/3/2026</a:t>
+              <a:t>26/3/2026</a:t>
             </a:fld>
             <a:endParaRPr lang="en-SG"/>
           </a:p>
@@ -1696,7 +1697,7 @@
           <a:p>
             <a:fld id="{0EAFE32E-95B7-4367-9495-9CBC389572F3}" type="datetimeFigureOut">
               <a:rPr lang="en-SG" smtClean="0"/>
-              <a:t>23/3/2026</a:t>
+              <a:t>26/3/2026</a:t>
             </a:fld>
             <a:endParaRPr lang="en-SG"/>
           </a:p>
@@ -1971,7 +1972,7 @@
           <a:p>
             <a:fld id="{0EAFE32E-95B7-4367-9495-9CBC389572F3}" type="datetimeFigureOut">
               <a:rPr lang="en-SG" smtClean="0"/>
-              <a:t>23/3/2026</a:t>
+              <a:t>26/3/2026</a:t>
             </a:fld>
             <a:endParaRPr lang="en-SG"/>
           </a:p>
@@ -2350,7 +2351,7 @@
           <a:p>
             <a:fld id="{0EAFE32E-95B7-4367-9495-9CBC389572F3}" type="datetimeFigureOut">
               <a:rPr lang="en-SG" smtClean="0"/>
-              <a:t>23/3/2026</a:t>
+              <a:t>26/3/2026</a:t>
             </a:fld>
             <a:endParaRPr lang="en-SG"/>
           </a:p>
@@ -2468,7 +2469,7 @@
           <a:p>
             <a:fld id="{0EAFE32E-95B7-4367-9495-9CBC389572F3}" type="datetimeFigureOut">
               <a:rPr lang="en-SG" smtClean="0"/>
-              <a:t>23/3/2026</a:t>
+              <a:t>26/3/2026</a:t>
             </a:fld>
             <a:endParaRPr lang="en-SG"/>
           </a:p>
@@ -2639,7 +2640,7 @@
           <a:p>
             <a:fld id="{0EAFE32E-95B7-4367-9495-9CBC389572F3}" type="datetimeFigureOut">
               <a:rPr lang="en-SG" smtClean="0"/>
-              <a:t>23/3/2026</a:t>
+              <a:t>26/3/2026</a:t>
             </a:fld>
             <a:endParaRPr lang="en-SG"/>
           </a:p>
@@ -2993,7 +2994,7 @@
           <a:p>
             <a:fld id="{0EAFE32E-95B7-4367-9495-9CBC389572F3}" type="datetimeFigureOut">
               <a:rPr lang="en-SG" smtClean="0"/>
-              <a:t>23/3/2026</a:t>
+              <a:t>26/3/2026</a:t>
             </a:fld>
             <a:endParaRPr lang="en-SG"/>
           </a:p>
@@ -3375,7 +3376,7 @@
           <a:p>
             <a:fld id="{0EAFE32E-95B7-4367-9495-9CBC389572F3}" type="datetimeFigureOut">
               <a:rPr lang="en-SG" smtClean="0"/>
-              <a:t>23/3/2026</a:t>
+              <a:t>26/3/2026</a:t>
             </a:fld>
             <a:endParaRPr lang="en-SG"/>
           </a:p>
@@ -3676,7 +3677,7 @@
           <a:p>
             <a:fld id="{0EAFE32E-95B7-4367-9495-9CBC389572F3}" type="datetimeFigureOut">
               <a:rPr lang="en-SG" smtClean="0"/>
-              <a:t>23/3/2026</a:t>
+              <a:t>26/3/2026</a:t>
             </a:fld>
             <a:endParaRPr lang="en-SG"/>
           </a:p>
@@ -4685,7 +4686,7 @@
         <p:cNvPr id="1" name="">
           <a:extLst>
             <a:ext uri="{FF2B5EF4-FFF2-40B4-BE49-F238E27FC236}">
-              <a16:creationId xmlns:a16="http://schemas.microsoft.com/office/drawing/2014/main" id="{7DEBC7E1-38D2-C221-E5BF-03ED1932473C}"/>
+              <a16:creationId xmlns:a16="http://schemas.microsoft.com/office/drawing/2014/main" id="{D237EDAC-3D8E-F970-3814-ED53DB2DE1F7}"/>
             </a:ext>
           </a:extLst>
         </p:cNvPr>
@@ -4705,7 +4706,7 @@
           <p:cNvPr id="2" name="Title 1">
             <a:extLst>
               <a:ext uri="{FF2B5EF4-FFF2-40B4-BE49-F238E27FC236}">
-                <a16:creationId xmlns:a16="http://schemas.microsoft.com/office/drawing/2014/main" id="{4BA38694-58EF-2491-AEFE-985272A1EAB4}"/>
+                <a16:creationId xmlns:a16="http://schemas.microsoft.com/office/drawing/2014/main" id="{28FC50EA-4D47-6A1D-0719-77FE920E1582}"/>
               </a:ext>
             </a:extLst>
           </p:cNvPr>
@@ -4722,238 +4723,42 @@
           <a:lstStyle/>
           <a:p>
             <a:r>
-              <a:rPr lang="en-SG" b="1" dirty="0"/>
-              <a:t>True Muon momentum (BNB)</a:t>
-            </a:r>
-          </a:p>
-        </p:txBody>
-      </p:sp>
-      <p:sp>
-        <p:nvSpPr>
-          <p:cNvPr id="4" name="TextBox 3">
+              <a:rPr lang="en-US" dirty="0"/>
+              <a:t>Removing non-muon interactions</a:t>
+            </a:r>
+            <a:endParaRPr lang="en-SG" dirty="0"/>
+          </a:p>
+        </p:txBody>
+      </p:sp>
+      <p:sp>
+        <p:nvSpPr>
+          <p:cNvPr id="3" name="Text Placeholder 2">
             <a:extLst>
               <a:ext uri="{FF2B5EF4-FFF2-40B4-BE49-F238E27FC236}">
-                <a16:creationId xmlns:a16="http://schemas.microsoft.com/office/drawing/2014/main" id="{E8AD99C5-91D7-73B1-3DA3-E899CA5A4782}"/>
+                <a16:creationId xmlns:a16="http://schemas.microsoft.com/office/drawing/2014/main" id="{E87CE641-7054-11CB-44D5-60C3DB901E76}"/>
               </a:ext>
             </a:extLst>
           </p:cNvPr>
-          <p:cNvSpPr txBox="1"/>
-          <p:nvPr/>
-        </p:nvSpPr>
-        <p:spPr>
-          <a:xfrm>
-            <a:off x="1097279" y="1815053"/>
-            <a:ext cx="10399395" cy="830997"/>
-          </a:xfrm>
-          <a:prstGeom prst="rect">
-            <a:avLst/>
-          </a:prstGeom>
-          <a:noFill/>
-        </p:spPr>
-        <p:txBody>
-          <a:bodyPr wrap="square">
-            <a:spAutoFit/>
-          </a:bodyPr>
-          <a:lstStyle/>
-          <a:p>
-            <a:r>
-              <a:rPr lang="en-US" sz="1600" b="1" dirty="0"/>
-              <a:t>Plotting BNB sample reconstructed leading muon momentum for each cumulative cut</a:t>
-            </a:r>
-            <a:endParaRPr lang="en-SG" sz="1600" dirty="0"/>
-          </a:p>
-          <a:p>
-            <a:endParaRPr lang="en-SG" sz="1600" b="1" dirty="0"/>
-          </a:p>
-          <a:p>
-            <a:endParaRPr lang="en-SG" sz="1600" b="1" dirty="0"/>
-          </a:p>
-        </p:txBody>
-      </p:sp>
-      <p:pic>
-        <p:nvPicPr>
-          <p:cNvPr id="8" name="Picture 7">
-            <a:extLst>
-              <a:ext uri="{FF2B5EF4-FFF2-40B4-BE49-F238E27FC236}">
-                <a16:creationId xmlns:a16="http://schemas.microsoft.com/office/drawing/2014/main" id="{6BBEE9F4-5741-EC67-0C78-8063B503B38F}"/>
-              </a:ext>
-            </a:extLst>
-          </p:cNvPr>
-          <p:cNvPicPr>
-            <a:picLocks noChangeAspect="1"/>
-          </p:cNvPicPr>
-          <p:nvPr/>
-        </p:nvPicPr>
-        <p:blipFill>
-          <a:blip r:embed="rId2"/>
-          <a:stretch>
-            <a:fillRect/>
-          </a:stretch>
-        </p:blipFill>
-        <p:spPr>
-          <a:xfrm>
-            <a:off x="599215" y="2259297"/>
-            <a:ext cx="3652144" cy="1952808"/>
-          </a:xfrm>
-          <a:prstGeom prst="rect">
-            <a:avLst/>
-          </a:prstGeom>
-        </p:spPr>
-      </p:pic>
-      <p:pic>
-        <p:nvPicPr>
-          <p:cNvPr id="11" name="Picture 10">
-            <a:extLst>
-              <a:ext uri="{FF2B5EF4-FFF2-40B4-BE49-F238E27FC236}">
-                <a16:creationId xmlns:a16="http://schemas.microsoft.com/office/drawing/2014/main" id="{8EAD3009-3C77-E51A-3692-81AB6C3761C6}"/>
-              </a:ext>
-            </a:extLst>
-          </p:cNvPr>
-          <p:cNvPicPr>
-            <a:picLocks noChangeAspect="1"/>
-          </p:cNvPicPr>
-          <p:nvPr/>
-        </p:nvPicPr>
-        <p:blipFill>
-          <a:blip r:embed="rId3"/>
-          <a:stretch>
-            <a:fillRect/>
-          </a:stretch>
-        </p:blipFill>
-        <p:spPr>
-          <a:xfrm>
-            <a:off x="4266998" y="2259297"/>
-            <a:ext cx="3620013" cy="1952808"/>
-          </a:xfrm>
-          <a:prstGeom prst="rect">
-            <a:avLst/>
-          </a:prstGeom>
-        </p:spPr>
-      </p:pic>
-      <p:pic>
-        <p:nvPicPr>
-          <p:cNvPr id="14" name="Picture 13">
-            <a:extLst>
-              <a:ext uri="{FF2B5EF4-FFF2-40B4-BE49-F238E27FC236}">
-                <a16:creationId xmlns:a16="http://schemas.microsoft.com/office/drawing/2014/main" id="{FC351707-D55D-AA06-9261-7A1EDDEED604}"/>
-              </a:ext>
-            </a:extLst>
-          </p:cNvPr>
-          <p:cNvPicPr>
-            <a:picLocks noChangeAspect="1"/>
-          </p:cNvPicPr>
-          <p:nvPr/>
-        </p:nvPicPr>
-        <p:blipFill>
-          <a:blip r:embed="rId4"/>
-          <a:stretch>
-            <a:fillRect/>
-          </a:stretch>
-        </p:blipFill>
-        <p:spPr>
-          <a:xfrm>
-            <a:off x="7902650" y="2259374"/>
-            <a:ext cx="3619727" cy="1952654"/>
-          </a:xfrm>
-          <a:prstGeom prst="rect">
-            <a:avLst/>
-          </a:prstGeom>
-        </p:spPr>
-      </p:pic>
-      <p:pic>
-        <p:nvPicPr>
-          <p:cNvPr id="17" name="Picture 16">
-            <a:extLst>
-              <a:ext uri="{FF2B5EF4-FFF2-40B4-BE49-F238E27FC236}">
-                <a16:creationId xmlns:a16="http://schemas.microsoft.com/office/drawing/2014/main" id="{5A657BA8-E188-E7BD-CB17-71491B19A804}"/>
-              </a:ext>
-            </a:extLst>
-          </p:cNvPr>
-          <p:cNvPicPr>
-            <a:picLocks noChangeAspect="1"/>
-          </p:cNvPicPr>
-          <p:nvPr/>
-        </p:nvPicPr>
-        <p:blipFill>
-          <a:blip r:embed="rId5"/>
-          <a:stretch>
-            <a:fillRect/>
-          </a:stretch>
-        </p:blipFill>
-        <p:spPr>
-          <a:xfrm>
-            <a:off x="646985" y="4280291"/>
-            <a:ext cx="3620013" cy="1952808"/>
-          </a:xfrm>
-          <a:prstGeom prst="rect">
-            <a:avLst/>
-          </a:prstGeom>
-        </p:spPr>
-      </p:pic>
-      <p:pic>
-        <p:nvPicPr>
-          <p:cNvPr id="20" name="Picture 19">
-            <a:extLst>
-              <a:ext uri="{FF2B5EF4-FFF2-40B4-BE49-F238E27FC236}">
-                <a16:creationId xmlns:a16="http://schemas.microsoft.com/office/drawing/2014/main" id="{97C79F41-8FD9-4080-73F0-2B822E6932B5}"/>
-              </a:ext>
-            </a:extLst>
-          </p:cNvPr>
-          <p:cNvPicPr>
-            <a:picLocks noChangeAspect="1"/>
-          </p:cNvPicPr>
-          <p:nvPr/>
-        </p:nvPicPr>
-        <p:blipFill>
-          <a:blip r:embed="rId6"/>
-          <a:stretch>
-            <a:fillRect/>
-          </a:stretch>
-        </p:blipFill>
-        <p:spPr>
-          <a:xfrm>
-            <a:off x="4302058" y="4280291"/>
-            <a:ext cx="3587883" cy="1952808"/>
-          </a:xfrm>
-          <a:prstGeom prst="rect">
-            <a:avLst/>
-          </a:prstGeom>
-        </p:spPr>
-      </p:pic>
-      <p:pic>
-        <p:nvPicPr>
-          <p:cNvPr id="25" name="Picture 24">
-            <a:extLst>
-              <a:ext uri="{FF2B5EF4-FFF2-40B4-BE49-F238E27FC236}">
-                <a16:creationId xmlns:a16="http://schemas.microsoft.com/office/drawing/2014/main" id="{9B44FA42-266D-8CC3-9F29-D94776B1AD93}"/>
-              </a:ext>
-            </a:extLst>
-          </p:cNvPr>
-          <p:cNvPicPr>
-            <a:picLocks noChangeAspect="1"/>
-          </p:cNvPicPr>
-          <p:nvPr/>
-        </p:nvPicPr>
-        <p:blipFill>
-          <a:blip r:embed="rId7"/>
-          <a:stretch>
-            <a:fillRect/>
-          </a:stretch>
-        </p:blipFill>
-        <p:spPr>
-          <a:xfrm>
-            <a:off x="7934494" y="4280291"/>
-            <a:ext cx="3587883" cy="1952808"/>
-          </a:xfrm>
-          <a:prstGeom prst="rect">
-            <a:avLst/>
-          </a:prstGeom>
-        </p:spPr>
-      </p:pic>
+          <p:cNvSpPr>
+            <a:spLocks noGrp="1"/>
+          </p:cNvSpPr>
+          <p:nvPr>
+            <p:ph type="body" idx="1"/>
+          </p:nvPr>
+        </p:nvSpPr>
+        <p:spPr/>
+        <p:txBody>
+          <a:bodyPr/>
+          <a:lstStyle/>
+          <a:p>
+            <a:endParaRPr lang="en-SG" dirty="0"/>
+          </a:p>
+        </p:txBody>
+      </p:sp>
     </p:spTree>
     <p:extLst>
       <p:ext uri="{BB962C8B-B14F-4D97-AF65-F5344CB8AC3E}">
-        <p14:creationId xmlns:p14="http://schemas.microsoft.com/office/powerpoint/2010/main" val="890684111"/>
+        <p14:creationId xmlns:p14="http://schemas.microsoft.com/office/powerpoint/2010/main" val="1506301596"/>
       </p:ext>
     </p:extLst>
   </p:cSld>
@@ -4971,7 +4776,7 @@
         <p:cNvPr id="1" name="">
           <a:extLst>
             <a:ext uri="{FF2B5EF4-FFF2-40B4-BE49-F238E27FC236}">
-              <a16:creationId xmlns:a16="http://schemas.microsoft.com/office/drawing/2014/main" id="{7301ED0C-0E09-39DC-ABAB-3F22FC19CC01}"/>
+              <a16:creationId xmlns:a16="http://schemas.microsoft.com/office/drawing/2014/main" id="{80C7441B-8F4F-B3A8-6AC1-021A8ADB3378}"/>
             </a:ext>
           </a:extLst>
         </p:cNvPr>
@@ -4991,7 +4796,7 @@
           <p:cNvPr id="2" name="Title 1">
             <a:extLst>
               <a:ext uri="{FF2B5EF4-FFF2-40B4-BE49-F238E27FC236}">
-                <a16:creationId xmlns:a16="http://schemas.microsoft.com/office/drawing/2014/main" id="{7FF4865C-6C33-21D7-994A-44BA21E96D4C}"/>
+                <a16:creationId xmlns:a16="http://schemas.microsoft.com/office/drawing/2014/main" id="{6D3E6D7E-1FC5-A0B8-F54B-45D7CCA3B4D7}"/>
               </a:ext>
             </a:extLst>
           </p:cNvPr>
@@ -5004,12 +4809,21 @@
         </p:nvSpPr>
         <p:spPr/>
         <p:txBody>
-          <a:bodyPr/>
+          <a:bodyPr>
+            <a:normAutofit fontScale="90000"/>
+          </a:bodyPr>
           <a:lstStyle/>
           <a:p>
             <a:r>
               <a:rPr lang="en-SG" b="1" dirty="0"/>
-              <a:t>True Muon momentum (Combined)</a:t>
+              <a:t>Reconstructed muon momentum </a:t>
+            </a:r>
+            <a:br>
+              <a:rPr lang="en-SG" b="1" dirty="0"/>
+            </a:br>
+            <a:r>
+              <a:rPr lang="en-SG" b="1" dirty="0"/>
+              <a:t>(Removing non primary muon-interactions)</a:t>
             </a:r>
           </a:p>
         </p:txBody>
@@ -5019,7 +4833,7 @@
           <p:cNvPr id="4" name="TextBox 3">
             <a:extLst>
               <a:ext uri="{FF2B5EF4-FFF2-40B4-BE49-F238E27FC236}">
-                <a16:creationId xmlns:a16="http://schemas.microsoft.com/office/drawing/2014/main" id="{1D78F462-D5C9-BEAC-248C-66861DA20B39}"/>
+                <a16:creationId xmlns:a16="http://schemas.microsoft.com/office/drawing/2014/main" id="{0F7E4C9D-7E79-809A-3D83-205367150E4D}"/>
               </a:ext>
             </a:extLst>
           </p:cNvPr>
@@ -5044,7 +4858,15 @@
           <a:p>
             <a:r>
               <a:rPr lang="en-US" sz="1600" b="1" dirty="0"/>
-              <a:t>Plotting combined and normalized reconstructed leading muon momentum for each cumulative cut</a:t>
+              <a:t>Removing interactions that do not contain a primary muon ("other v", "NC Npi0", and "</a:t>
+            </a:r>
+            <a:r>
+              <a:rPr lang="en-US" sz="1600" b="1" dirty="0" err="1"/>
+              <a:t>cosmics</a:t>
+            </a:r>
+            <a:r>
+              <a:rPr lang="en-US" sz="1600" b="1" dirty="0"/>
+              <a:t>“)</a:t>
             </a:r>
             <a:endParaRPr lang="en-SG" sz="1600" dirty="0"/>
           </a:p>
@@ -5053,6 +4875,35 @@
           </a:p>
           <a:p>
             <a:endParaRPr lang="en-SG" sz="1600" b="1" dirty="0"/>
+          </a:p>
+        </p:txBody>
+      </p:sp>
+      <p:sp>
+        <p:nvSpPr>
+          <p:cNvPr id="3" name="Slide Number Placeholder 2">
+            <a:extLst>
+              <a:ext uri="{FF2B5EF4-FFF2-40B4-BE49-F238E27FC236}">
+                <a16:creationId xmlns:a16="http://schemas.microsoft.com/office/drawing/2014/main" id="{CC48FE98-B6CD-7A67-7F68-97A8B3236147}"/>
+              </a:ext>
+            </a:extLst>
+          </p:cNvPr>
+          <p:cNvSpPr>
+            <a:spLocks noGrp="1"/>
+          </p:cNvSpPr>
+          <p:nvPr>
+            <p:ph type="sldNum" sz="quarter" idx="12"/>
+          </p:nvPr>
+        </p:nvSpPr>
+        <p:spPr/>
+        <p:txBody>
+          <a:bodyPr/>
+          <a:lstStyle/>
+          <a:p>
+            <a:fld id="{BBCD8743-5A53-4A98-BC6F-5DFD6CC2F469}" type="slidenum">
+              <a:rPr lang="en-SG" smtClean="0"/>
+              <a:t>11</a:t>
+            </a:fld>
+            <a:endParaRPr lang="en-SG"/>
           </a:p>
         </p:txBody>
       </p:sp>
@@ -5061,7 +4912,7 @@
           <p:cNvPr id="6" name="Picture 5">
             <a:extLst>
               <a:ext uri="{FF2B5EF4-FFF2-40B4-BE49-F238E27FC236}">
-                <a16:creationId xmlns:a16="http://schemas.microsoft.com/office/drawing/2014/main" id="{C3FAEC80-2D5D-1E0C-9EEC-E0512A0DD3B6}"/>
+                <a16:creationId xmlns:a16="http://schemas.microsoft.com/office/drawing/2014/main" id="{6A6684CE-7A0B-2353-587F-EA9DE16D3B46}"/>
               </a:ext>
             </a:extLst>
           </p:cNvPr>
@@ -5078,8 +4929,8 @@
         </p:blipFill>
         <p:spPr>
           <a:xfrm>
-            <a:off x="485437" y="2259296"/>
-            <a:ext cx="3619728" cy="1978013"/>
+            <a:off x="463307" y="2259295"/>
+            <a:ext cx="3619730" cy="1978014"/>
           </a:xfrm>
           <a:prstGeom prst="rect">
             <a:avLst/>
@@ -5091,7 +4942,7 @@
           <p:cNvPr id="9" name="Picture 8">
             <a:extLst>
               <a:ext uri="{FF2B5EF4-FFF2-40B4-BE49-F238E27FC236}">
-                <a16:creationId xmlns:a16="http://schemas.microsoft.com/office/drawing/2014/main" id="{CF5A8666-76B8-7C12-E5CC-0169955A4B6A}"/>
+                <a16:creationId xmlns:a16="http://schemas.microsoft.com/office/drawing/2014/main" id="{04CA3034-C995-9123-BAFD-C3892C8497C6}"/>
               </a:ext>
             </a:extLst>
           </p:cNvPr>
@@ -5108,8 +4959,8 @@
         </p:blipFill>
         <p:spPr>
           <a:xfrm>
-            <a:off x="4283208" y="2230551"/>
-            <a:ext cx="3619728" cy="1978013"/>
+            <a:off x="4276950" y="2259295"/>
+            <a:ext cx="3619729" cy="1978014"/>
           </a:xfrm>
           <a:prstGeom prst="rect">
             <a:avLst/>
@@ -5121,7 +4972,7 @@
           <p:cNvPr id="12" name="Picture 11">
             <a:extLst>
               <a:ext uri="{FF2B5EF4-FFF2-40B4-BE49-F238E27FC236}">
-                <a16:creationId xmlns:a16="http://schemas.microsoft.com/office/drawing/2014/main" id="{4F534882-62C4-4D5E-80A3-9514F496C095}"/>
+                <a16:creationId xmlns:a16="http://schemas.microsoft.com/office/drawing/2014/main" id="{768F1260-C49E-DB05-17F4-45FFA4FCDAB2}"/>
               </a:ext>
             </a:extLst>
           </p:cNvPr>
@@ -5138,8 +4989,8 @@
         </p:blipFill>
         <p:spPr>
           <a:xfrm>
-            <a:off x="8086834" y="2259295"/>
-            <a:ext cx="3619729" cy="1978014"/>
+            <a:off x="8098090" y="2259295"/>
+            <a:ext cx="3619730" cy="1978014"/>
           </a:xfrm>
           <a:prstGeom prst="rect">
             <a:avLst/>
@@ -5151,7 +5002,7 @@
           <p:cNvPr id="15" name="Picture 14">
             <a:extLst>
               <a:ext uri="{FF2B5EF4-FFF2-40B4-BE49-F238E27FC236}">
-                <a16:creationId xmlns:a16="http://schemas.microsoft.com/office/drawing/2014/main" id="{70F5C46E-0BD5-95B9-B688-9D269606AF28}"/>
+                <a16:creationId xmlns:a16="http://schemas.microsoft.com/office/drawing/2014/main" id="{BB6A832B-DEAC-B541-5261-25F52F0A814E}"/>
               </a:ext>
             </a:extLst>
           </p:cNvPr>
@@ -5168,8 +5019,8 @@
         </p:blipFill>
         <p:spPr>
           <a:xfrm>
-            <a:off x="485437" y="4280290"/>
-            <a:ext cx="3619728" cy="1978013"/>
+            <a:off x="474182" y="4280289"/>
+            <a:ext cx="3619729" cy="1978014"/>
           </a:xfrm>
           <a:prstGeom prst="rect">
             <a:avLst/>
@@ -5181,7 +5032,7 @@
           <p:cNvPr id="18" name="Picture 17">
             <a:extLst>
               <a:ext uri="{FF2B5EF4-FFF2-40B4-BE49-F238E27FC236}">
-                <a16:creationId xmlns:a16="http://schemas.microsoft.com/office/drawing/2014/main" id="{BFE28F31-909D-413F-26EB-0271008A0E2F}"/>
+                <a16:creationId xmlns:a16="http://schemas.microsoft.com/office/drawing/2014/main" id="{80F37AF0-55AE-2AA9-3D96-D000140717A7}"/>
               </a:ext>
             </a:extLst>
           </p:cNvPr>
@@ -5198,8 +5049,8 @@
         </p:blipFill>
         <p:spPr>
           <a:xfrm>
-            <a:off x="4285878" y="4280289"/>
-            <a:ext cx="3681203" cy="1978014"/>
+            <a:off x="4286135" y="4280289"/>
+            <a:ext cx="3619730" cy="1978014"/>
           </a:xfrm>
           <a:prstGeom prst="rect">
             <a:avLst/>
@@ -5211,7 +5062,7 @@
           <p:cNvPr id="21" name="Picture 20">
             <a:extLst>
               <a:ext uri="{FF2B5EF4-FFF2-40B4-BE49-F238E27FC236}">
-                <a16:creationId xmlns:a16="http://schemas.microsoft.com/office/drawing/2014/main" id="{384F915B-E0B5-D474-E1E4-764D3F3BFA64}"/>
+                <a16:creationId xmlns:a16="http://schemas.microsoft.com/office/drawing/2014/main" id="{F3DF3D5D-2F60-0232-B9C1-30E35BF1CA5F}"/>
               </a:ext>
             </a:extLst>
           </p:cNvPr>
@@ -5228,8 +5079,8 @@
         </p:blipFill>
         <p:spPr>
           <a:xfrm>
-            <a:off x="7967081" y="4280289"/>
-            <a:ext cx="4031967" cy="1978014"/>
+            <a:off x="8098090" y="4280289"/>
+            <a:ext cx="3619729" cy="1978014"/>
           </a:xfrm>
           <a:prstGeom prst="rect">
             <a:avLst/>
@@ -5239,7 +5090,339 @@
     </p:spTree>
     <p:extLst>
       <p:ext uri="{BB962C8B-B14F-4D97-AF65-F5344CB8AC3E}">
-        <p14:creationId xmlns:p14="http://schemas.microsoft.com/office/powerpoint/2010/main" val="2815635132"/>
+        <p14:creationId xmlns:p14="http://schemas.microsoft.com/office/powerpoint/2010/main" val="2290249843"/>
+      </p:ext>
+    </p:extLst>
+  </p:cSld>
+  <p:clrMapOvr>
+    <a:masterClrMapping/>
+  </p:clrMapOvr>
+</p:sld>
+</file>
+
+<file path=ppt/slides/slide12.xml><?xml version="1.0" encoding="utf-8"?>
+<p:sld xmlns:a="http://schemas.openxmlformats.org/drawingml/2006/main" xmlns:r="http://schemas.openxmlformats.org/officeDocument/2006/relationships" xmlns:p="http://schemas.openxmlformats.org/presentationml/2006/main">
+  <p:cSld>
+    <p:spTree>
+      <p:nvGrpSpPr>
+        <p:cNvPr id="1" name="">
+          <a:extLst>
+            <a:ext uri="{FF2B5EF4-FFF2-40B4-BE49-F238E27FC236}">
+              <a16:creationId xmlns:a16="http://schemas.microsoft.com/office/drawing/2014/main" id="{91F2CCC0-7C3D-1693-1F5C-1592C7B14CC2}"/>
+            </a:ext>
+          </a:extLst>
+        </p:cNvPr>
+        <p:cNvGrpSpPr/>
+        <p:nvPr/>
+      </p:nvGrpSpPr>
+      <p:grpSpPr>
+        <a:xfrm>
+          <a:off x="0" y="0"/>
+          <a:ext cx="0" cy="0"/>
+          <a:chOff x="0" y="0"/>
+          <a:chExt cx="0" cy="0"/>
+        </a:xfrm>
+      </p:grpSpPr>
+      <p:sp>
+        <p:nvSpPr>
+          <p:cNvPr id="2" name="Title 1">
+            <a:extLst>
+              <a:ext uri="{FF2B5EF4-FFF2-40B4-BE49-F238E27FC236}">
+                <a16:creationId xmlns:a16="http://schemas.microsoft.com/office/drawing/2014/main" id="{97B58887-358D-8AC8-0F23-F8BD30232E52}"/>
+              </a:ext>
+            </a:extLst>
+          </p:cNvPr>
+          <p:cNvSpPr>
+            <a:spLocks noGrp="1"/>
+          </p:cNvSpPr>
+          <p:nvPr>
+            <p:ph type="title"/>
+          </p:nvPr>
+        </p:nvSpPr>
+        <p:spPr/>
+        <p:txBody>
+          <a:bodyPr>
+            <a:normAutofit fontScale="90000"/>
+          </a:bodyPr>
+          <a:lstStyle/>
+          <a:p>
+            <a:r>
+              <a:rPr lang="en-SG" b="1" dirty="0"/>
+              <a:t>True muon momentum </a:t>
+            </a:r>
+            <a:br>
+              <a:rPr lang="en-SG" b="1" dirty="0"/>
+            </a:br>
+            <a:r>
+              <a:rPr lang="en-SG" b="1" dirty="0"/>
+              <a:t>(Removing non primary muon-interactions)</a:t>
+            </a:r>
+          </a:p>
+        </p:txBody>
+      </p:sp>
+      <p:sp>
+        <p:nvSpPr>
+          <p:cNvPr id="4" name="TextBox 3">
+            <a:extLst>
+              <a:ext uri="{FF2B5EF4-FFF2-40B4-BE49-F238E27FC236}">
+                <a16:creationId xmlns:a16="http://schemas.microsoft.com/office/drawing/2014/main" id="{35C2C7AC-F803-13A2-DC49-E6849DFCEA9C}"/>
+              </a:ext>
+            </a:extLst>
+          </p:cNvPr>
+          <p:cNvSpPr txBox="1"/>
+          <p:nvPr/>
+        </p:nvSpPr>
+        <p:spPr>
+          <a:xfrm>
+            <a:off x="1097279" y="1815053"/>
+            <a:ext cx="10399395" cy="830997"/>
+          </a:xfrm>
+          <a:prstGeom prst="rect">
+            <a:avLst/>
+          </a:prstGeom>
+          <a:noFill/>
+        </p:spPr>
+        <p:txBody>
+          <a:bodyPr wrap="square">
+            <a:spAutoFit/>
+          </a:bodyPr>
+          <a:lstStyle/>
+          <a:p>
+            <a:r>
+              <a:rPr lang="en-US" sz="1600" b="1" dirty="0"/>
+              <a:t>Removing interactions that do not contain a primary muon ("other v", "NC Npi0", and "</a:t>
+            </a:r>
+            <a:r>
+              <a:rPr lang="en-US" sz="1600" b="1" dirty="0" err="1"/>
+              <a:t>cosmics</a:t>
+            </a:r>
+            <a:r>
+              <a:rPr lang="en-US" sz="1600" b="1" dirty="0"/>
+              <a:t>“)</a:t>
+            </a:r>
+            <a:endParaRPr lang="en-SG" sz="1600" dirty="0"/>
+          </a:p>
+          <a:p>
+            <a:endParaRPr lang="en-SG" sz="1600" b="1" dirty="0"/>
+          </a:p>
+          <a:p>
+            <a:endParaRPr lang="en-SG" sz="1600" b="1" dirty="0"/>
+          </a:p>
+        </p:txBody>
+      </p:sp>
+      <p:sp>
+        <p:nvSpPr>
+          <p:cNvPr id="3" name="Slide Number Placeholder 2">
+            <a:extLst>
+              <a:ext uri="{FF2B5EF4-FFF2-40B4-BE49-F238E27FC236}">
+                <a16:creationId xmlns:a16="http://schemas.microsoft.com/office/drawing/2014/main" id="{4A9E16CD-B411-F0E3-C7A6-8856BC386576}"/>
+              </a:ext>
+            </a:extLst>
+          </p:cNvPr>
+          <p:cNvSpPr>
+            <a:spLocks noGrp="1"/>
+          </p:cNvSpPr>
+          <p:nvPr>
+            <p:ph type="sldNum" sz="quarter" idx="12"/>
+          </p:nvPr>
+        </p:nvSpPr>
+        <p:spPr/>
+        <p:txBody>
+          <a:bodyPr/>
+          <a:lstStyle/>
+          <a:p>
+            <a:fld id="{BBCD8743-5A53-4A98-BC6F-5DFD6CC2F469}" type="slidenum">
+              <a:rPr lang="en-SG" smtClean="0"/>
+              <a:t>12</a:t>
+            </a:fld>
+            <a:endParaRPr lang="en-SG"/>
+          </a:p>
+        </p:txBody>
+      </p:sp>
+      <p:pic>
+        <p:nvPicPr>
+          <p:cNvPr id="7" name="Picture 6">
+            <a:extLst>
+              <a:ext uri="{FF2B5EF4-FFF2-40B4-BE49-F238E27FC236}">
+                <a16:creationId xmlns:a16="http://schemas.microsoft.com/office/drawing/2014/main" id="{3A77B4A5-9590-B2A9-AF32-C3D86707EA26}"/>
+              </a:ext>
+            </a:extLst>
+          </p:cNvPr>
+          <p:cNvPicPr>
+            <a:picLocks noChangeAspect="1"/>
+          </p:cNvPicPr>
+          <p:nvPr/>
+        </p:nvPicPr>
+        <p:blipFill>
+          <a:blip r:embed="rId2"/>
+          <a:stretch>
+            <a:fillRect/>
+          </a:stretch>
+        </p:blipFill>
+        <p:spPr>
+          <a:xfrm>
+            <a:off x="447036" y="2230551"/>
+            <a:ext cx="3652274" cy="1978014"/>
+          </a:xfrm>
+          <a:prstGeom prst="rect">
+            <a:avLst/>
+          </a:prstGeom>
+        </p:spPr>
+      </p:pic>
+      <p:pic>
+        <p:nvPicPr>
+          <p:cNvPr id="10" name="Picture 9">
+            <a:extLst>
+              <a:ext uri="{FF2B5EF4-FFF2-40B4-BE49-F238E27FC236}">
+                <a16:creationId xmlns:a16="http://schemas.microsoft.com/office/drawing/2014/main" id="{8082FF93-BD56-86EB-9350-E38681CCEC25}"/>
+              </a:ext>
+            </a:extLst>
+          </p:cNvPr>
+          <p:cNvPicPr>
+            <a:picLocks noChangeAspect="1"/>
+          </p:cNvPicPr>
+          <p:nvPr/>
+        </p:nvPicPr>
+        <p:blipFill>
+          <a:blip r:embed="rId3"/>
+          <a:stretch>
+            <a:fillRect/>
+          </a:stretch>
+        </p:blipFill>
+        <p:spPr>
+          <a:xfrm>
+            <a:off x="4266935" y="2259295"/>
+            <a:ext cx="3652274" cy="1978014"/>
+          </a:xfrm>
+          <a:prstGeom prst="rect">
+            <a:avLst/>
+          </a:prstGeom>
+        </p:spPr>
+      </p:pic>
+      <p:pic>
+        <p:nvPicPr>
+          <p:cNvPr id="13" name="Picture 12">
+            <a:extLst>
+              <a:ext uri="{FF2B5EF4-FFF2-40B4-BE49-F238E27FC236}">
+                <a16:creationId xmlns:a16="http://schemas.microsoft.com/office/drawing/2014/main" id="{C5B41CA7-9380-6423-CF5D-99ED9546112D}"/>
+              </a:ext>
+            </a:extLst>
+          </p:cNvPr>
+          <p:cNvPicPr>
+            <a:picLocks noChangeAspect="1"/>
+          </p:cNvPicPr>
+          <p:nvPr/>
+        </p:nvPicPr>
+        <p:blipFill>
+          <a:blip r:embed="rId4"/>
+          <a:stretch>
+            <a:fillRect/>
+          </a:stretch>
+        </p:blipFill>
+        <p:spPr>
+          <a:xfrm>
+            <a:off x="8090593" y="2259295"/>
+            <a:ext cx="3619729" cy="1978014"/>
+          </a:xfrm>
+          <a:prstGeom prst="rect">
+            <a:avLst/>
+          </a:prstGeom>
+        </p:spPr>
+      </p:pic>
+      <p:pic>
+        <p:nvPicPr>
+          <p:cNvPr id="16" name="Picture 15">
+            <a:extLst>
+              <a:ext uri="{FF2B5EF4-FFF2-40B4-BE49-F238E27FC236}">
+                <a16:creationId xmlns:a16="http://schemas.microsoft.com/office/drawing/2014/main" id="{05A28A1B-C8A4-736E-4AAC-FA09C79C498A}"/>
+              </a:ext>
+            </a:extLst>
+          </p:cNvPr>
+          <p:cNvPicPr>
+            <a:picLocks noChangeAspect="1"/>
+          </p:cNvPicPr>
+          <p:nvPr/>
+        </p:nvPicPr>
+        <p:blipFill>
+          <a:blip r:embed="rId5"/>
+          <a:stretch>
+            <a:fillRect/>
+          </a:stretch>
+        </p:blipFill>
+        <p:spPr>
+          <a:xfrm>
+            <a:off x="463308" y="4280289"/>
+            <a:ext cx="3619729" cy="1978014"/>
+          </a:xfrm>
+          <a:prstGeom prst="rect">
+            <a:avLst/>
+          </a:prstGeom>
+        </p:spPr>
+      </p:pic>
+      <p:pic>
+        <p:nvPicPr>
+          <p:cNvPr id="19" name="Picture 18">
+            <a:extLst>
+              <a:ext uri="{FF2B5EF4-FFF2-40B4-BE49-F238E27FC236}">
+                <a16:creationId xmlns:a16="http://schemas.microsoft.com/office/drawing/2014/main" id="{F504AD22-E212-E044-1555-B113B69C7A8A}"/>
+              </a:ext>
+            </a:extLst>
+          </p:cNvPr>
+          <p:cNvPicPr>
+            <a:picLocks noChangeAspect="1"/>
+          </p:cNvPicPr>
+          <p:nvPr/>
+        </p:nvPicPr>
+        <p:blipFill>
+          <a:blip r:embed="rId6"/>
+          <a:stretch>
+            <a:fillRect/>
+          </a:stretch>
+        </p:blipFill>
+        <p:spPr>
+          <a:xfrm>
+            <a:off x="4283207" y="4280289"/>
+            <a:ext cx="3619729" cy="1978014"/>
+          </a:xfrm>
+          <a:prstGeom prst="rect">
+            <a:avLst/>
+          </a:prstGeom>
+        </p:spPr>
+      </p:pic>
+      <p:pic>
+        <p:nvPicPr>
+          <p:cNvPr id="22" name="Picture 21">
+            <a:extLst>
+              <a:ext uri="{FF2B5EF4-FFF2-40B4-BE49-F238E27FC236}">
+                <a16:creationId xmlns:a16="http://schemas.microsoft.com/office/drawing/2014/main" id="{970F2A09-3A03-BD0F-5987-937EE3EC489D}"/>
+              </a:ext>
+            </a:extLst>
+          </p:cNvPr>
+          <p:cNvPicPr>
+            <a:picLocks noChangeAspect="1"/>
+          </p:cNvPicPr>
+          <p:nvPr/>
+        </p:nvPicPr>
+        <p:blipFill>
+          <a:blip r:embed="rId7"/>
+          <a:stretch>
+            <a:fillRect/>
+          </a:stretch>
+        </p:blipFill>
+        <p:spPr>
+          <a:xfrm>
+            <a:off x="8098090" y="4280289"/>
+            <a:ext cx="3619730" cy="1978014"/>
+          </a:xfrm>
+          <a:prstGeom prst="rect">
+            <a:avLst/>
+          </a:prstGeom>
+        </p:spPr>
+      </p:pic>
+    </p:spTree>
+    <p:extLst>
+      <p:ext uri="{BB962C8B-B14F-4D97-AF65-F5344CB8AC3E}">
+        <p14:creationId xmlns:p14="http://schemas.microsoft.com/office/powerpoint/2010/main" val="944869005"/>
       </p:ext>
     </p:extLst>
   </p:cSld>
@@ -5338,13 +5521,7 @@
   <p:cSld>
     <p:spTree>
       <p:nvGrpSpPr>
-        <p:cNvPr id="1" name="">
-          <a:extLst>
-            <a:ext uri="{FF2B5EF4-FFF2-40B4-BE49-F238E27FC236}">
-              <a16:creationId xmlns:a16="http://schemas.microsoft.com/office/drawing/2014/main" id="{7E65DFD2-27AC-AA66-0F8A-E62178714BD7}"/>
-            </a:ext>
-          </a:extLst>
-        </p:cNvPr>
+        <p:cNvPr id="1" name=""/>
         <p:cNvGrpSpPr/>
         <p:nvPr/>
       </p:nvGrpSpPr>
@@ -5361,7 +5538,7 @@
           <p:cNvPr id="2" name="Title 1">
             <a:extLst>
               <a:ext uri="{FF2B5EF4-FFF2-40B4-BE49-F238E27FC236}">
-                <a16:creationId xmlns:a16="http://schemas.microsoft.com/office/drawing/2014/main" id="{2DFA2980-FB9B-D1BB-E642-C11C62C93A5C}"/>
+                <a16:creationId xmlns:a16="http://schemas.microsoft.com/office/drawing/2014/main" id="{A8782301-8BBC-0D9C-EAA0-552C35027CDB}"/>
               </a:ext>
             </a:extLst>
           </p:cNvPr>
@@ -5378,76 +5555,52 @@
           <a:lstStyle/>
           <a:p>
             <a:r>
-              <a:rPr lang="en-SG" b="1" dirty="0"/>
-              <a:t>Reconstructed Muon momentum (</a:t>
-            </a:r>
-            <a:r>
-              <a:rPr lang="en-SG" b="1" dirty="0" err="1"/>
-              <a:t>NuMI</a:t>
-            </a:r>
-            <a:r>
-              <a:rPr lang="en-SG" b="1" dirty="0"/>
-              <a:t>)</a:t>
-            </a:r>
-          </a:p>
-        </p:txBody>
-      </p:sp>
-      <p:sp>
-        <p:nvSpPr>
-          <p:cNvPr id="4" name="TextBox 3">
+              <a:rPr lang="en-US" dirty="0"/>
+              <a:t>Reconstructed muon momentum </a:t>
+            </a:r>
+            <a:endParaRPr lang="en-SG" dirty="0"/>
+          </a:p>
+        </p:txBody>
+      </p:sp>
+      <p:sp>
+        <p:nvSpPr>
+          <p:cNvPr id="3" name="Content Placeholder 2">
             <a:extLst>
               <a:ext uri="{FF2B5EF4-FFF2-40B4-BE49-F238E27FC236}">
-                <a16:creationId xmlns:a16="http://schemas.microsoft.com/office/drawing/2014/main" id="{01E11028-B927-F516-3552-519E2C22FFE1}"/>
+                <a16:creationId xmlns:a16="http://schemas.microsoft.com/office/drawing/2014/main" id="{2D101C6D-DDAE-865F-BE68-80DDF1120A0F}"/>
               </a:ext>
             </a:extLst>
           </p:cNvPr>
-          <p:cNvSpPr txBox="1"/>
-          <p:nvPr/>
-        </p:nvSpPr>
-        <p:spPr>
-          <a:xfrm>
-            <a:off x="1097279" y="1815053"/>
-            <a:ext cx="10399395" cy="830997"/>
-          </a:xfrm>
-          <a:prstGeom prst="rect">
-            <a:avLst/>
-          </a:prstGeom>
-          <a:noFill/>
-        </p:spPr>
-        <p:txBody>
-          <a:bodyPr wrap="square">
-            <a:spAutoFit/>
-          </a:bodyPr>
-          <a:lstStyle/>
-          <a:p>
-            <a:r>
-              <a:rPr lang="en-US" sz="1600" b="1" dirty="0"/>
-              <a:t>Plotting </a:t>
-            </a:r>
-            <a:r>
-              <a:rPr lang="en-US" sz="1600" b="1" dirty="0" err="1"/>
-              <a:t>NuMI</a:t>
-            </a:r>
-            <a:r>
-              <a:rPr lang="en-US" sz="1600" b="1" dirty="0"/>
-              <a:t> sample reconstructed leading muon momentum for each cumulative cut</a:t>
-            </a:r>
-            <a:endParaRPr lang="en-SG" sz="1600" dirty="0"/>
-          </a:p>
-          <a:p>
-            <a:endParaRPr lang="en-SG" sz="1600" b="1" dirty="0"/>
-          </a:p>
-          <a:p>
-            <a:endParaRPr lang="en-SG" sz="1600" b="1" dirty="0"/>
+          <p:cNvSpPr>
+            <a:spLocks noGrp="1"/>
+          </p:cNvSpPr>
+          <p:nvPr>
+            <p:ph idx="1"/>
+          </p:nvPr>
+        </p:nvSpPr>
+        <p:spPr/>
+        <p:txBody>
+          <a:bodyPr/>
+          <a:lstStyle/>
+          <a:p>
+            <a:pPr>
+              <a:buFont typeface="Arial" panose="020B0604020202020204" pitchFamily="34" charset="0"/>
+              <a:buChar char="•"/>
+            </a:pPr>
+            <a:r>
+              <a:rPr lang="en-US" dirty="0"/>
+              <a:t>Resolved binning issue for muon and pi0 momentum</a:t>
+            </a:r>
+            <a:endParaRPr lang="en-SG" dirty="0"/>
           </a:p>
         </p:txBody>
       </p:sp>
       <p:pic>
         <p:nvPicPr>
-          <p:cNvPr id="5" name="Picture 4">
+          <p:cNvPr id="6" name="Picture 5">
             <a:extLst>
               <a:ext uri="{FF2B5EF4-FFF2-40B4-BE49-F238E27FC236}">
-                <a16:creationId xmlns:a16="http://schemas.microsoft.com/office/drawing/2014/main" id="{F64C5F1C-7313-CDB0-0862-ABA348F499D3}"/>
+                <a16:creationId xmlns:a16="http://schemas.microsoft.com/office/drawing/2014/main" id="{DEB622AB-1E8A-9C92-1517-71A883C06DBF}"/>
               </a:ext>
             </a:extLst>
           </p:cNvPr>
@@ -5464,8 +5617,8 @@
         </p:blipFill>
         <p:spPr>
           <a:xfrm>
-            <a:off x="695326" y="2284100"/>
-            <a:ext cx="3587882" cy="1935475"/>
+            <a:off x="1275924" y="2111394"/>
+            <a:ext cx="3846195" cy="3757700"/>
           </a:xfrm>
           <a:prstGeom prst="rect">
             <a:avLst/>
@@ -5474,10 +5627,10 @@
       </p:pic>
       <p:pic>
         <p:nvPicPr>
-          <p:cNvPr id="8" name="Picture 7">
+          <p:cNvPr id="7" name="Picture 6">
             <a:extLst>
               <a:ext uri="{FF2B5EF4-FFF2-40B4-BE49-F238E27FC236}">
-                <a16:creationId xmlns:a16="http://schemas.microsoft.com/office/drawing/2014/main" id="{261E3F89-3A66-D50A-2FC5-AAEEE661C873}"/>
+                <a16:creationId xmlns:a16="http://schemas.microsoft.com/office/drawing/2014/main" id="{C63364CA-813E-6335-D85C-A5F52C40C0AE}"/>
               </a:ext>
             </a:extLst>
           </p:cNvPr>
@@ -5494,138 +5647,99 @@
         </p:blipFill>
         <p:spPr>
           <a:xfrm>
-            <a:off x="4283208" y="2284100"/>
-            <a:ext cx="3587883" cy="1935475"/>
+            <a:off x="5303093" y="2206644"/>
+            <a:ext cx="5791627" cy="3662450"/>
           </a:xfrm>
           <a:prstGeom prst="rect">
             <a:avLst/>
           </a:prstGeom>
         </p:spPr>
       </p:pic>
-      <p:pic>
-        <p:nvPicPr>
-          <p:cNvPr id="11" name="Picture 10">
+      <p:sp>
+        <p:nvSpPr>
+          <p:cNvPr id="8" name="TextBox 7">
             <a:extLst>
               <a:ext uri="{FF2B5EF4-FFF2-40B4-BE49-F238E27FC236}">
-                <a16:creationId xmlns:a16="http://schemas.microsoft.com/office/drawing/2014/main" id="{8D2C6D51-BDD1-18D7-F9DC-B984BAD901C1}"/>
+                <a16:creationId xmlns:a16="http://schemas.microsoft.com/office/drawing/2014/main" id="{7DDAB012-B6AF-35A2-DB1B-ED140B81B461}"/>
               </a:ext>
             </a:extLst>
           </p:cNvPr>
-          <p:cNvPicPr>
-            <a:picLocks noChangeAspect="1"/>
-          </p:cNvPicPr>
+          <p:cNvSpPr txBox="1"/>
           <p:nvPr/>
-        </p:nvPicPr>
-        <p:blipFill>
-          <a:blip r:embed="rId4"/>
-          <a:stretch>
-            <a:fillRect/>
-          </a:stretch>
-        </p:blipFill>
-        <p:spPr>
-          <a:xfrm>
-            <a:off x="7871091" y="2284100"/>
-            <a:ext cx="3587882" cy="1935475"/>
+        </p:nvSpPr>
+        <p:spPr>
+          <a:xfrm>
+            <a:off x="2002154" y="5832688"/>
+            <a:ext cx="4535458" cy="307777"/>
           </a:xfrm>
           <a:prstGeom prst="rect">
             <a:avLst/>
           </a:prstGeom>
-        </p:spPr>
-      </p:pic>
-      <p:pic>
-        <p:nvPicPr>
-          <p:cNvPr id="13" name="Picture 12">
+          <a:noFill/>
+        </p:spPr>
+        <p:txBody>
+          <a:bodyPr wrap="square">
+            <a:spAutoFit/>
+          </a:bodyPr>
+          <a:lstStyle/>
+          <a:p>
+            <a:r>
+              <a:rPr lang="en-SG" sz="1400" b="1" dirty="0"/>
+              <a:t>Muon momentum </a:t>
+            </a:r>
+            <a:r>
+              <a:rPr lang="en-US" sz="1400" b="1" dirty="0"/>
+              <a:t>from lane’s paper</a:t>
+            </a:r>
+            <a:endParaRPr lang="en-SG" sz="1400" b="1" dirty="0"/>
+          </a:p>
+        </p:txBody>
+      </p:sp>
+      <p:sp>
+        <p:nvSpPr>
+          <p:cNvPr id="9" name="TextBox 8">
             <a:extLst>
               <a:ext uri="{FF2B5EF4-FFF2-40B4-BE49-F238E27FC236}">
-                <a16:creationId xmlns:a16="http://schemas.microsoft.com/office/drawing/2014/main" id="{6F5BDD76-DD19-2610-74BC-D9C6EA3B0CB1}"/>
+                <a16:creationId xmlns:a16="http://schemas.microsoft.com/office/drawing/2014/main" id="{C310FF5A-F823-55D3-2270-E5446AFBDBC9}"/>
               </a:ext>
             </a:extLst>
           </p:cNvPr>
-          <p:cNvPicPr>
-            <a:picLocks noChangeAspect="1"/>
-          </p:cNvPicPr>
+          <p:cNvSpPr txBox="1"/>
           <p:nvPr/>
-        </p:nvPicPr>
-        <p:blipFill>
-          <a:blip r:embed="rId5"/>
-          <a:stretch>
-            <a:fillRect/>
-          </a:stretch>
-        </p:blipFill>
-        <p:spPr>
-          <a:xfrm>
-            <a:off x="695326" y="4289112"/>
-            <a:ext cx="3587882" cy="1935475"/>
+        </p:nvSpPr>
+        <p:spPr>
+          <a:xfrm>
+            <a:off x="5981172" y="5850891"/>
+            <a:ext cx="5174508" cy="307777"/>
           </a:xfrm>
           <a:prstGeom prst="rect">
             <a:avLst/>
           </a:prstGeom>
-        </p:spPr>
-      </p:pic>
-      <p:pic>
-        <p:nvPicPr>
-          <p:cNvPr id="17" name="Picture 16">
-            <a:extLst>
-              <a:ext uri="{FF2B5EF4-FFF2-40B4-BE49-F238E27FC236}">
-                <a16:creationId xmlns:a16="http://schemas.microsoft.com/office/drawing/2014/main" id="{4D5EF91B-45F9-0AAB-3368-14F704D3CC31}"/>
-              </a:ext>
-            </a:extLst>
-          </p:cNvPr>
-          <p:cNvPicPr>
-            <a:picLocks noChangeAspect="1"/>
-          </p:cNvPicPr>
-          <p:nvPr/>
-        </p:nvPicPr>
-        <p:blipFill>
-          <a:blip r:embed="rId6"/>
-          <a:stretch>
-            <a:fillRect/>
-          </a:stretch>
-        </p:blipFill>
-        <p:spPr>
-          <a:xfrm>
-            <a:off x="4283207" y="4280445"/>
-            <a:ext cx="3587883" cy="1952808"/>
-          </a:xfrm>
-          <a:prstGeom prst="rect">
-            <a:avLst/>
-          </a:prstGeom>
-        </p:spPr>
-      </p:pic>
-      <p:pic>
-        <p:nvPicPr>
-          <p:cNvPr id="19" name="Picture 18">
-            <a:extLst>
-              <a:ext uri="{FF2B5EF4-FFF2-40B4-BE49-F238E27FC236}">
-                <a16:creationId xmlns:a16="http://schemas.microsoft.com/office/drawing/2014/main" id="{E95B6127-728C-6E68-F4AA-97A004C14260}"/>
-              </a:ext>
-            </a:extLst>
-          </p:cNvPr>
-          <p:cNvPicPr>
-            <a:picLocks noChangeAspect="1"/>
-          </p:cNvPicPr>
-          <p:nvPr/>
-        </p:nvPicPr>
-        <p:blipFill>
-          <a:blip r:embed="rId7"/>
-          <a:stretch>
-            <a:fillRect/>
-          </a:stretch>
-        </p:blipFill>
-        <p:spPr>
-          <a:xfrm>
-            <a:off x="7871090" y="4289112"/>
-            <a:ext cx="3587883" cy="1952808"/>
-          </a:xfrm>
-          <a:prstGeom prst="rect">
-            <a:avLst/>
-          </a:prstGeom>
-        </p:spPr>
-      </p:pic>
+          <a:noFill/>
+        </p:spPr>
+        <p:txBody>
+          <a:bodyPr wrap="square">
+            <a:spAutoFit/>
+          </a:bodyPr>
+          <a:lstStyle/>
+          <a:p>
+            <a:pPr algn="ctr"/>
+            <a:r>
+              <a:rPr lang="en-SG" sz="1400" b="1" dirty="0"/>
+              <a:t>Muon momentum </a:t>
+            </a:r>
+            <a:r>
+              <a:rPr lang="en-US" sz="1400" b="1" dirty="0"/>
+              <a:t>from my BNB sample</a:t>
+            </a:r>
+            <a:endParaRPr lang="en-SG" sz="1400" b="1" dirty="0"/>
+          </a:p>
+        </p:txBody>
+      </p:sp>
     </p:spTree>
     <p:extLst>
       <p:ext uri="{BB962C8B-B14F-4D97-AF65-F5344CB8AC3E}">
-        <p14:creationId xmlns:p14="http://schemas.microsoft.com/office/powerpoint/2010/main" val="2560520947"/>
+        <p14:creationId xmlns:p14="http://schemas.microsoft.com/office/powerpoint/2010/main" val="2793459829"/>
       </p:ext>
     </p:extLst>
   </p:cSld>
@@ -5643,7 +5757,7 @@
         <p:cNvPr id="1" name="">
           <a:extLst>
             <a:ext uri="{FF2B5EF4-FFF2-40B4-BE49-F238E27FC236}">
-              <a16:creationId xmlns:a16="http://schemas.microsoft.com/office/drawing/2014/main" id="{7151EEFC-54BA-857A-54EF-FEFAE85F094D}"/>
+              <a16:creationId xmlns:a16="http://schemas.microsoft.com/office/drawing/2014/main" id="{8B3CAB11-06A5-D2A0-AF08-989ADC51FEC1}"/>
             </a:ext>
           </a:extLst>
         </p:cNvPr>
@@ -5663,7 +5777,7 @@
           <p:cNvPr id="2" name="Title 1">
             <a:extLst>
               <a:ext uri="{FF2B5EF4-FFF2-40B4-BE49-F238E27FC236}">
-                <a16:creationId xmlns:a16="http://schemas.microsoft.com/office/drawing/2014/main" id="{B48D5B8C-18C0-1777-2FEE-3B0DD835F9AE}"/>
+                <a16:creationId xmlns:a16="http://schemas.microsoft.com/office/drawing/2014/main" id="{EC101402-6F99-A00E-0D6D-834628EE38C7}"/>
               </a:ext>
             </a:extLst>
           </p:cNvPr>
@@ -5680,18 +5794,60 @@
           <a:lstStyle/>
           <a:p>
             <a:r>
+              <a:rPr lang="en-US" dirty="0"/>
+              <a:t>Reconstructed </a:t>
+            </a:r>
+            <a:r>
               <a:rPr lang="en-SG" b="1" dirty="0"/>
-              <a:t>Reconstructed Muon momentum (BNB)</a:t>
-            </a:r>
-          </a:p>
-        </p:txBody>
-      </p:sp>
-      <p:sp>
-        <p:nvSpPr>
-          <p:cNvPr id="4" name="TextBox 3">
+              <a:t>Pi0</a:t>
+            </a:r>
+            <a:r>
+              <a:rPr lang="en-US" dirty="0"/>
+              <a:t> momentum </a:t>
+            </a:r>
+            <a:endParaRPr lang="en-SG" dirty="0"/>
+          </a:p>
+        </p:txBody>
+      </p:sp>
+      <p:sp>
+        <p:nvSpPr>
+          <p:cNvPr id="3" name="Content Placeholder 2">
             <a:extLst>
               <a:ext uri="{FF2B5EF4-FFF2-40B4-BE49-F238E27FC236}">
-                <a16:creationId xmlns:a16="http://schemas.microsoft.com/office/drawing/2014/main" id="{743DA7C1-641F-BDF1-8A6D-2DEA7EA874E0}"/>
+                <a16:creationId xmlns:a16="http://schemas.microsoft.com/office/drawing/2014/main" id="{A2556DBF-0D91-AB41-BA6A-FBFDCFB7D3D7}"/>
+              </a:ext>
+            </a:extLst>
+          </p:cNvPr>
+          <p:cNvSpPr>
+            <a:spLocks noGrp="1"/>
+          </p:cNvSpPr>
+          <p:nvPr>
+            <p:ph idx="1"/>
+          </p:nvPr>
+        </p:nvSpPr>
+        <p:spPr/>
+        <p:txBody>
+          <a:bodyPr/>
+          <a:lstStyle/>
+          <a:p>
+            <a:pPr>
+              <a:buFont typeface="Arial" panose="020B0604020202020204" pitchFamily="34" charset="0"/>
+              <a:buChar char="•"/>
+            </a:pPr>
+            <a:r>
+              <a:rPr lang="en-US" dirty="0"/>
+              <a:t>Resolved binning issue for muon and pi0 momentum</a:t>
+            </a:r>
+            <a:endParaRPr lang="en-SG" dirty="0"/>
+          </a:p>
+        </p:txBody>
+      </p:sp>
+      <p:sp>
+        <p:nvSpPr>
+          <p:cNvPr id="8" name="TextBox 7">
+            <a:extLst>
+              <a:ext uri="{FF2B5EF4-FFF2-40B4-BE49-F238E27FC236}">
+                <a16:creationId xmlns:a16="http://schemas.microsoft.com/office/drawing/2014/main" id="{3E395C95-7DBA-E3B7-C9DA-62D93E3DD2AB}"/>
               </a:ext>
             </a:extLst>
           </p:cNvPr>
@@ -5700,8 +5856,8 @@
         </p:nvSpPr>
         <p:spPr>
           <a:xfrm>
-            <a:off x="1097279" y="1815053"/>
-            <a:ext cx="10399395" cy="830997"/>
+            <a:off x="2002154" y="5832688"/>
+            <a:ext cx="4535458" cy="307777"/>
           </a:xfrm>
           <a:prstGeom prst="rect">
             <a:avLst/>
@@ -5715,25 +5871,64 @@
           <a:lstStyle/>
           <a:p>
             <a:r>
-              <a:rPr lang="en-US" sz="1600" b="1" dirty="0"/>
-              <a:t>Plotting BNB sample reconstructed leading muon momentum for each cumulative cut</a:t>
-            </a:r>
-            <a:endParaRPr lang="en-SG" sz="1600" dirty="0"/>
-          </a:p>
-          <a:p>
-            <a:endParaRPr lang="en-SG" sz="1600" b="1" dirty="0"/>
-          </a:p>
-          <a:p>
-            <a:endParaRPr lang="en-SG" sz="1600" b="1" dirty="0"/>
+              <a:rPr lang="en-SG" sz="1400" b="1" dirty="0"/>
+              <a:t>Pi0 momentum </a:t>
+            </a:r>
+            <a:r>
+              <a:rPr lang="en-US" sz="1400" b="1" dirty="0"/>
+              <a:t>from lane’s paper</a:t>
+            </a:r>
+            <a:endParaRPr lang="en-SG" sz="1400" b="1" dirty="0"/>
+          </a:p>
+        </p:txBody>
+      </p:sp>
+      <p:sp>
+        <p:nvSpPr>
+          <p:cNvPr id="9" name="TextBox 8">
+            <a:extLst>
+              <a:ext uri="{FF2B5EF4-FFF2-40B4-BE49-F238E27FC236}">
+                <a16:creationId xmlns:a16="http://schemas.microsoft.com/office/drawing/2014/main" id="{2FF8ECAF-FFF9-4F7F-80B4-5A854BA66130}"/>
+              </a:ext>
+            </a:extLst>
+          </p:cNvPr>
+          <p:cNvSpPr txBox="1"/>
+          <p:nvPr/>
+        </p:nvSpPr>
+        <p:spPr>
+          <a:xfrm>
+            <a:off x="5981172" y="5850891"/>
+            <a:ext cx="5174508" cy="307777"/>
+          </a:xfrm>
+          <a:prstGeom prst="rect">
+            <a:avLst/>
+          </a:prstGeom>
+          <a:noFill/>
+        </p:spPr>
+        <p:txBody>
+          <a:bodyPr wrap="square">
+            <a:spAutoFit/>
+          </a:bodyPr>
+          <a:lstStyle/>
+          <a:p>
+            <a:pPr algn="ctr"/>
+            <a:r>
+              <a:rPr lang="en-SG" sz="1400" b="1" dirty="0"/>
+              <a:t>Pi0 momentum </a:t>
+            </a:r>
+            <a:r>
+              <a:rPr lang="en-US" sz="1400" b="1" dirty="0"/>
+              <a:t>from my BNB sample</a:t>
+            </a:r>
+            <a:endParaRPr lang="en-SG" sz="1400" b="1" dirty="0"/>
           </a:p>
         </p:txBody>
       </p:sp>
       <p:pic>
         <p:nvPicPr>
-          <p:cNvPr id="6" name="Picture 5">
+          <p:cNvPr id="12" name="Picture 11">
             <a:extLst>
               <a:ext uri="{FF2B5EF4-FFF2-40B4-BE49-F238E27FC236}">
-                <a16:creationId xmlns:a16="http://schemas.microsoft.com/office/drawing/2014/main" id="{B1D2628B-3AF6-EF32-2944-5E61250F9A34}"/>
+                <a16:creationId xmlns:a16="http://schemas.microsoft.com/office/drawing/2014/main" id="{FF0F67D1-61DF-2542-6273-1FB160898D62}"/>
               </a:ext>
             </a:extLst>
           </p:cNvPr>
@@ -5750,8 +5945,8 @@
         </p:blipFill>
         <p:spPr>
           <a:xfrm>
-            <a:off x="679403" y="2276476"/>
-            <a:ext cx="3619727" cy="1935475"/>
+            <a:off x="1418466" y="2183367"/>
+            <a:ext cx="3744662" cy="3595134"/>
           </a:xfrm>
           <a:prstGeom prst="rect">
             <a:avLst/>
@@ -5760,10 +5955,10 @@
       </p:pic>
       <p:pic>
         <p:nvPicPr>
-          <p:cNvPr id="9" name="Picture 8">
+          <p:cNvPr id="13" name="Picture 12">
             <a:extLst>
               <a:ext uri="{FF2B5EF4-FFF2-40B4-BE49-F238E27FC236}">
-                <a16:creationId xmlns:a16="http://schemas.microsoft.com/office/drawing/2014/main" id="{1C490728-D5CA-14FC-67B4-917AE8AF8B58}"/>
+                <a16:creationId xmlns:a16="http://schemas.microsoft.com/office/drawing/2014/main" id="{1ADB067B-F47B-F21A-0C3D-B2FC957B8DD4}"/>
               </a:ext>
             </a:extLst>
           </p:cNvPr>
@@ -5780,128 +5975,8 @@
         </p:blipFill>
         <p:spPr>
           <a:xfrm>
-            <a:off x="4267284" y="2259297"/>
-            <a:ext cx="3619727" cy="1952654"/>
-          </a:xfrm>
-          <a:prstGeom prst="rect">
-            <a:avLst/>
-          </a:prstGeom>
-        </p:spPr>
-      </p:pic>
-      <p:pic>
-        <p:nvPicPr>
-          <p:cNvPr id="12" name="Picture 11">
-            <a:extLst>
-              <a:ext uri="{FF2B5EF4-FFF2-40B4-BE49-F238E27FC236}">
-                <a16:creationId xmlns:a16="http://schemas.microsoft.com/office/drawing/2014/main" id="{D0A2B969-D64B-B6C2-39E7-6D08524597D7}"/>
-              </a:ext>
-            </a:extLst>
-          </p:cNvPr>
-          <p:cNvPicPr>
-            <a:picLocks noChangeAspect="1"/>
-          </p:cNvPicPr>
-          <p:nvPr/>
-        </p:nvPicPr>
-        <p:blipFill>
-          <a:blip r:embed="rId4"/>
-          <a:stretch>
-            <a:fillRect/>
-          </a:stretch>
-        </p:blipFill>
-        <p:spPr>
-          <a:xfrm>
-            <a:off x="7892872" y="2259297"/>
-            <a:ext cx="3619727" cy="1952654"/>
-          </a:xfrm>
-          <a:prstGeom prst="rect">
-            <a:avLst/>
-          </a:prstGeom>
-        </p:spPr>
-      </p:pic>
-      <p:pic>
-        <p:nvPicPr>
-          <p:cNvPr id="15" name="Picture 14">
-            <a:extLst>
-              <a:ext uri="{FF2B5EF4-FFF2-40B4-BE49-F238E27FC236}">
-                <a16:creationId xmlns:a16="http://schemas.microsoft.com/office/drawing/2014/main" id="{52C071CC-E763-39DD-0EAB-6344B3AF1ABA}"/>
-              </a:ext>
-            </a:extLst>
-          </p:cNvPr>
-          <p:cNvPicPr>
-            <a:picLocks noChangeAspect="1"/>
-          </p:cNvPicPr>
-          <p:nvPr/>
-        </p:nvPicPr>
-        <p:blipFill>
-          <a:blip r:embed="rId5"/>
-          <a:stretch>
-            <a:fillRect/>
-          </a:stretch>
-        </p:blipFill>
-        <p:spPr>
-          <a:xfrm>
-            <a:off x="663480" y="4280445"/>
-            <a:ext cx="3619727" cy="1952654"/>
-          </a:xfrm>
-          <a:prstGeom prst="rect">
-            <a:avLst/>
-          </a:prstGeom>
-        </p:spPr>
-      </p:pic>
-      <p:pic>
-        <p:nvPicPr>
-          <p:cNvPr id="18" name="Picture 17">
-            <a:extLst>
-              <a:ext uri="{FF2B5EF4-FFF2-40B4-BE49-F238E27FC236}">
-                <a16:creationId xmlns:a16="http://schemas.microsoft.com/office/drawing/2014/main" id="{30CF01F4-17FA-FDFC-32F8-A777D46BB229}"/>
-              </a:ext>
-            </a:extLst>
-          </p:cNvPr>
-          <p:cNvPicPr>
-            <a:picLocks noChangeAspect="1"/>
-          </p:cNvPicPr>
-          <p:nvPr/>
-        </p:nvPicPr>
-        <p:blipFill>
-          <a:blip r:embed="rId6"/>
-          <a:stretch>
-            <a:fillRect/>
-          </a:stretch>
-        </p:blipFill>
-        <p:spPr>
-          <a:xfrm>
-            <a:off x="4299128" y="4280291"/>
-            <a:ext cx="3587883" cy="1952808"/>
-          </a:xfrm>
-          <a:prstGeom prst="rect">
-            <a:avLst/>
-          </a:prstGeom>
-        </p:spPr>
-      </p:pic>
-      <p:pic>
-        <p:nvPicPr>
-          <p:cNvPr id="23" name="Picture 22">
-            <a:extLst>
-              <a:ext uri="{FF2B5EF4-FFF2-40B4-BE49-F238E27FC236}">
-                <a16:creationId xmlns:a16="http://schemas.microsoft.com/office/drawing/2014/main" id="{356F9807-274B-2D08-CDB0-4ACFCA83E278}"/>
-              </a:ext>
-            </a:extLst>
-          </p:cNvPr>
-          <p:cNvPicPr>
-            <a:picLocks noChangeAspect="1"/>
-          </p:cNvPicPr>
-          <p:nvPr/>
-        </p:nvPicPr>
-        <p:blipFill>
-          <a:blip r:embed="rId7"/>
-          <a:stretch>
-            <a:fillRect/>
-          </a:stretch>
-        </p:blipFill>
-        <p:spPr>
-          <a:xfrm>
-            <a:off x="7908793" y="4280291"/>
-            <a:ext cx="3587883" cy="1952808"/>
+            <a:off x="5549683" y="2243423"/>
+            <a:ext cx="5605997" cy="3553281"/>
           </a:xfrm>
           <a:prstGeom prst="rect">
             <a:avLst/>
@@ -5911,7 +5986,7 @@
     </p:spTree>
     <p:extLst>
       <p:ext uri="{BB962C8B-B14F-4D97-AF65-F5344CB8AC3E}">
-        <p14:creationId xmlns:p14="http://schemas.microsoft.com/office/powerpoint/2010/main" val="2366966882"/>
+        <p14:creationId xmlns:p14="http://schemas.microsoft.com/office/powerpoint/2010/main" val="1325648818"/>
       </p:ext>
     </p:extLst>
   </p:cSld>
@@ -5922,6 +5997,508 @@
 </file>
 
 <file path=ppt/slides/slide5.xml><?xml version="1.0" encoding="utf-8"?>
+<p:sld xmlns:a="http://schemas.openxmlformats.org/drawingml/2006/main" xmlns:r="http://schemas.openxmlformats.org/officeDocument/2006/relationships" xmlns:p="http://schemas.openxmlformats.org/presentationml/2006/main">
+  <p:cSld>
+    <p:spTree>
+      <p:nvGrpSpPr>
+        <p:cNvPr id="1" name="">
+          <a:extLst>
+            <a:ext uri="{FF2B5EF4-FFF2-40B4-BE49-F238E27FC236}">
+              <a16:creationId xmlns:a16="http://schemas.microsoft.com/office/drawing/2014/main" id="{011BEBBA-7B40-7F2C-3114-BDCE2B5980ED}"/>
+            </a:ext>
+          </a:extLst>
+        </p:cNvPr>
+        <p:cNvGrpSpPr/>
+        <p:nvPr/>
+      </p:nvGrpSpPr>
+      <p:grpSpPr>
+        <a:xfrm>
+          <a:off x="0" y="0"/>
+          <a:ext cx="0" cy="0"/>
+          <a:chOff x="0" y="0"/>
+          <a:chExt cx="0" cy="0"/>
+        </a:xfrm>
+      </p:grpSpPr>
+      <p:sp>
+        <p:nvSpPr>
+          <p:cNvPr id="2" name="Title 1">
+            <a:extLst>
+              <a:ext uri="{FF2B5EF4-FFF2-40B4-BE49-F238E27FC236}">
+                <a16:creationId xmlns:a16="http://schemas.microsoft.com/office/drawing/2014/main" id="{C4D026FD-4CCF-B2BB-2F43-332A53B6955E}"/>
+              </a:ext>
+            </a:extLst>
+          </p:cNvPr>
+          <p:cNvSpPr>
+            <a:spLocks noGrp="1"/>
+          </p:cNvSpPr>
+          <p:nvPr>
+            <p:ph type="title"/>
+          </p:nvPr>
+        </p:nvSpPr>
+        <p:spPr/>
+        <p:txBody>
+          <a:bodyPr/>
+          <a:lstStyle/>
+          <a:p>
+            <a:r>
+              <a:rPr lang="en-US" dirty="0"/>
+              <a:t>Reconstructed muon momentum </a:t>
+            </a:r>
+            <a:endParaRPr lang="en-SG" dirty="0"/>
+          </a:p>
+        </p:txBody>
+      </p:sp>
+      <p:sp>
+        <p:nvSpPr>
+          <p:cNvPr id="3" name="Content Placeholder 2">
+            <a:extLst>
+              <a:ext uri="{FF2B5EF4-FFF2-40B4-BE49-F238E27FC236}">
+                <a16:creationId xmlns:a16="http://schemas.microsoft.com/office/drawing/2014/main" id="{A1C5375F-3BFF-15B3-93CE-4771BCD9EEFC}"/>
+              </a:ext>
+            </a:extLst>
+          </p:cNvPr>
+          <p:cNvSpPr>
+            <a:spLocks noGrp="1"/>
+          </p:cNvSpPr>
+          <p:nvPr>
+            <p:ph idx="1"/>
+          </p:nvPr>
+        </p:nvSpPr>
+        <p:spPr/>
+        <p:txBody>
+          <a:bodyPr/>
+          <a:lstStyle/>
+          <a:p>
+            <a:pPr>
+              <a:buFont typeface="Arial" panose="020B0604020202020204" pitchFamily="34" charset="0"/>
+              <a:buChar char="•"/>
+            </a:pPr>
+            <a:r>
+              <a:rPr lang="en-US" dirty="0"/>
+              <a:t>Resolved binning issue for muon and pi0 momentum</a:t>
+            </a:r>
+            <a:endParaRPr lang="en-SG" dirty="0"/>
+          </a:p>
+        </p:txBody>
+      </p:sp>
+      <p:sp>
+        <p:nvSpPr>
+          <p:cNvPr id="8" name="TextBox 7">
+            <a:extLst>
+              <a:ext uri="{FF2B5EF4-FFF2-40B4-BE49-F238E27FC236}">
+                <a16:creationId xmlns:a16="http://schemas.microsoft.com/office/drawing/2014/main" id="{A8BF3FBE-B8E2-D9CF-6156-315303A22539}"/>
+              </a:ext>
+            </a:extLst>
+          </p:cNvPr>
+          <p:cNvSpPr txBox="1"/>
+          <p:nvPr/>
+        </p:nvSpPr>
+        <p:spPr>
+          <a:xfrm>
+            <a:off x="2002154" y="5832688"/>
+            <a:ext cx="4535458" cy="307777"/>
+          </a:xfrm>
+          <a:prstGeom prst="rect">
+            <a:avLst/>
+          </a:prstGeom>
+          <a:noFill/>
+        </p:spPr>
+        <p:txBody>
+          <a:bodyPr wrap="square">
+            <a:spAutoFit/>
+          </a:bodyPr>
+          <a:lstStyle/>
+          <a:p>
+            <a:r>
+              <a:rPr lang="en-SG" sz="1400" b="1" dirty="0"/>
+              <a:t>Muon momentum </a:t>
+            </a:r>
+            <a:r>
+              <a:rPr lang="en-US" sz="1400" b="1" dirty="0"/>
+              <a:t>from </a:t>
+            </a:r>
+            <a:r>
+              <a:rPr lang="en-US" sz="1400" b="1" dirty="0" err="1"/>
+              <a:t>NuMI</a:t>
+            </a:r>
+            <a:r>
+              <a:rPr lang="en-US" sz="1400" b="1" dirty="0"/>
+              <a:t> selection</a:t>
+            </a:r>
+            <a:endParaRPr lang="en-SG" sz="1400" b="1" dirty="0"/>
+          </a:p>
+        </p:txBody>
+      </p:sp>
+      <p:sp>
+        <p:nvSpPr>
+          <p:cNvPr id="9" name="TextBox 8">
+            <a:extLst>
+              <a:ext uri="{FF2B5EF4-FFF2-40B4-BE49-F238E27FC236}">
+                <a16:creationId xmlns:a16="http://schemas.microsoft.com/office/drawing/2014/main" id="{5210DA2F-73E3-A666-3EA3-F5984EB8290A}"/>
+              </a:ext>
+            </a:extLst>
+          </p:cNvPr>
+          <p:cNvSpPr txBox="1"/>
+          <p:nvPr/>
+        </p:nvSpPr>
+        <p:spPr>
+          <a:xfrm>
+            <a:off x="5981172" y="5850891"/>
+            <a:ext cx="5174508" cy="307777"/>
+          </a:xfrm>
+          <a:prstGeom prst="rect">
+            <a:avLst/>
+          </a:prstGeom>
+          <a:noFill/>
+        </p:spPr>
+        <p:txBody>
+          <a:bodyPr wrap="square">
+            <a:spAutoFit/>
+          </a:bodyPr>
+          <a:lstStyle/>
+          <a:p>
+            <a:pPr algn="ctr"/>
+            <a:r>
+              <a:rPr lang="en-SG" sz="1400" b="1" dirty="0"/>
+              <a:t>Muon momentum </a:t>
+            </a:r>
+            <a:r>
+              <a:rPr lang="en-US" sz="1400" b="1" dirty="0"/>
+              <a:t>from BNB selection</a:t>
+            </a:r>
+            <a:endParaRPr lang="en-SG" sz="1400" b="1" dirty="0"/>
+          </a:p>
+        </p:txBody>
+      </p:sp>
+      <p:pic>
+        <p:nvPicPr>
+          <p:cNvPr id="4" name="Picture 3">
+            <a:extLst>
+              <a:ext uri="{FF2B5EF4-FFF2-40B4-BE49-F238E27FC236}">
+                <a16:creationId xmlns:a16="http://schemas.microsoft.com/office/drawing/2014/main" id="{5CA6B2FA-A3AA-73ED-9C59-D57E919EB7FB}"/>
+              </a:ext>
+            </a:extLst>
+          </p:cNvPr>
+          <p:cNvPicPr>
+            <a:picLocks noChangeAspect="1"/>
+          </p:cNvPicPr>
+          <p:nvPr/>
+        </p:nvPicPr>
+        <p:blipFill>
+          <a:blip r:embed="rId2"/>
+          <a:stretch>
+            <a:fillRect/>
+          </a:stretch>
+        </p:blipFill>
+        <p:spPr>
+          <a:xfrm>
+            <a:off x="5981172" y="2596892"/>
+            <a:ext cx="5174508" cy="3272202"/>
+          </a:xfrm>
+          <a:prstGeom prst="rect">
+            <a:avLst/>
+          </a:prstGeom>
+        </p:spPr>
+      </p:pic>
+      <p:pic>
+        <p:nvPicPr>
+          <p:cNvPr id="5" name="Picture 4">
+            <a:extLst>
+              <a:ext uri="{FF2B5EF4-FFF2-40B4-BE49-F238E27FC236}">
+                <a16:creationId xmlns:a16="http://schemas.microsoft.com/office/drawing/2014/main" id="{2EC7F4BB-C4B1-5B14-3396-FF49E36205E4}"/>
+              </a:ext>
+            </a:extLst>
+          </p:cNvPr>
+          <p:cNvPicPr>
+            <a:picLocks noChangeAspect="1"/>
+          </p:cNvPicPr>
+          <p:nvPr/>
+        </p:nvPicPr>
+        <p:blipFill>
+          <a:blip r:embed="rId3"/>
+          <a:stretch>
+            <a:fillRect/>
+          </a:stretch>
+        </p:blipFill>
+        <p:spPr>
+          <a:xfrm>
+            <a:off x="794993" y="2681602"/>
+            <a:ext cx="4982979" cy="3151086"/>
+          </a:xfrm>
+          <a:prstGeom prst="rect">
+            <a:avLst/>
+          </a:prstGeom>
+        </p:spPr>
+      </p:pic>
+    </p:spTree>
+    <p:extLst>
+      <p:ext uri="{BB962C8B-B14F-4D97-AF65-F5344CB8AC3E}">
+        <p14:creationId xmlns:p14="http://schemas.microsoft.com/office/powerpoint/2010/main" val="4092820132"/>
+      </p:ext>
+    </p:extLst>
+  </p:cSld>
+  <p:clrMapOvr>
+    <a:masterClrMapping/>
+  </p:clrMapOvr>
+</p:sld>
+</file>
+
+<file path=ppt/slides/slide6.xml><?xml version="1.0" encoding="utf-8"?>
+<p:sld xmlns:a="http://schemas.openxmlformats.org/drawingml/2006/main" xmlns:r="http://schemas.openxmlformats.org/officeDocument/2006/relationships" xmlns:p="http://schemas.openxmlformats.org/presentationml/2006/main">
+  <p:cSld>
+    <p:spTree>
+      <p:nvGrpSpPr>
+        <p:cNvPr id="1" name="">
+          <a:extLst>
+            <a:ext uri="{FF2B5EF4-FFF2-40B4-BE49-F238E27FC236}">
+              <a16:creationId xmlns:a16="http://schemas.microsoft.com/office/drawing/2014/main" id="{BB3811C3-645B-81E5-A661-7F19DC7877A9}"/>
+            </a:ext>
+          </a:extLst>
+        </p:cNvPr>
+        <p:cNvGrpSpPr/>
+        <p:nvPr/>
+      </p:nvGrpSpPr>
+      <p:grpSpPr>
+        <a:xfrm>
+          <a:off x="0" y="0"/>
+          <a:ext cx="0" cy="0"/>
+          <a:chOff x="0" y="0"/>
+          <a:chExt cx="0" cy="0"/>
+        </a:xfrm>
+      </p:grpSpPr>
+      <p:sp>
+        <p:nvSpPr>
+          <p:cNvPr id="2" name="Title 1">
+            <a:extLst>
+              <a:ext uri="{FF2B5EF4-FFF2-40B4-BE49-F238E27FC236}">
+                <a16:creationId xmlns:a16="http://schemas.microsoft.com/office/drawing/2014/main" id="{D90EF597-8D46-0EAA-320E-6EE7C5041075}"/>
+              </a:ext>
+            </a:extLst>
+          </p:cNvPr>
+          <p:cNvSpPr>
+            <a:spLocks noGrp="1"/>
+          </p:cNvSpPr>
+          <p:nvPr>
+            <p:ph type="title"/>
+          </p:nvPr>
+        </p:nvSpPr>
+        <p:spPr/>
+        <p:txBody>
+          <a:bodyPr/>
+          <a:lstStyle/>
+          <a:p>
+            <a:r>
+              <a:rPr lang="en-US" dirty="0"/>
+              <a:t>Reconstructed </a:t>
+            </a:r>
+            <a:r>
+              <a:rPr lang="en-SG" b="1" dirty="0"/>
+              <a:t>Pi0</a:t>
+            </a:r>
+            <a:r>
+              <a:rPr lang="en-US" dirty="0"/>
+              <a:t> momentum </a:t>
+            </a:r>
+            <a:endParaRPr lang="en-SG" dirty="0"/>
+          </a:p>
+        </p:txBody>
+      </p:sp>
+      <p:sp>
+        <p:nvSpPr>
+          <p:cNvPr id="3" name="Content Placeholder 2">
+            <a:extLst>
+              <a:ext uri="{FF2B5EF4-FFF2-40B4-BE49-F238E27FC236}">
+                <a16:creationId xmlns:a16="http://schemas.microsoft.com/office/drawing/2014/main" id="{A0CF47E6-EA32-DF31-EA1C-73C8705DC9E4}"/>
+              </a:ext>
+            </a:extLst>
+          </p:cNvPr>
+          <p:cNvSpPr>
+            <a:spLocks noGrp="1"/>
+          </p:cNvSpPr>
+          <p:nvPr>
+            <p:ph idx="1"/>
+          </p:nvPr>
+        </p:nvSpPr>
+        <p:spPr/>
+        <p:txBody>
+          <a:bodyPr/>
+          <a:lstStyle/>
+          <a:p>
+            <a:pPr>
+              <a:buFont typeface="Arial" panose="020B0604020202020204" pitchFamily="34" charset="0"/>
+              <a:buChar char="•"/>
+            </a:pPr>
+            <a:r>
+              <a:rPr lang="en-US" dirty="0"/>
+              <a:t>Resolved binning issue for muon and pi0 momentum</a:t>
+            </a:r>
+            <a:endParaRPr lang="en-SG" dirty="0"/>
+          </a:p>
+        </p:txBody>
+      </p:sp>
+      <p:sp>
+        <p:nvSpPr>
+          <p:cNvPr id="8" name="TextBox 7">
+            <a:extLst>
+              <a:ext uri="{FF2B5EF4-FFF2-40B4-BE49-F238E27FC236}">
+                <a16:creationId xmlns:a16="http://schemas.microsoft.com/office/drawing/2014/main" id="{C9BFD4C5-1E1A-6F19-07C3-89308FF663BF}"/>
+              </a:ext>
+            </a:extLst>
+          </p:cNvPr>
+          <p:cNvSpPr txBox="1"/>
+          <p:nvPr/>
+        </p:nvSpPr>
+        <p:spPr>
+          <a:xfrm>
+            <a:off x="2002154" y="5832688"/>
+            <a:ext cx="4535458" cy="307777"/>
+          </a:xfrm>
+          <a:prstGeom prst="rect">
+            <a:avLst/>
+          </a:prstGeom>
+          <a:noFill/>
+        </p:spPr>
+        <p:txBody>
+          <a:bodyPr wrap="square">
+            <a:spAutoFit/>
+          </a:bodyPr>
+          <a:lstStyle/>
+          <a:p>
+            <a:r>
+              <a:rPr lang="en-SG" sz="1400" b="1" dirty="0"/>
+              <a:t>Pi0 momentum </a:t>
+            </a:r>
+            <a:r>
+              <a:rPr lang="en-US" sz="1400" b="1" dirty="0"/>
+              <a:t>from </a:t>
+            </a:r>
+            <a:r>
+              <a:rPr lang="en-US" sz="1400" b="1" dirty="0" err="1"/>
+              <a:t>NuMI</a:t>
+            </a:r>
+            <a:r>
+              <a:rPr lang="en-US" sz="1400" b="1" dirty="0"/>
+              <a:t> selection</a:t>
+            </a:r>
+            <a:endParaRPr lang="en-SG" sz="1400" b="1" dirty="0"/>
+          </a:p>
+        </p:txBody>
+      </p:sp>
+      <p:sp>
+        <p:nvSpPr>
+          <p:cNvPr id="9" name="TextBox 8">
+            <a:extLst>
+              <a:ext uri="{FF2B5EF4-FFF2-40B4-BE49-F238E27FC236}">
+                <a16:creationId xmlns:a16="http://schemas.microsoft.com/office/drawing/2014/main" id="{D54ED692-7FCE-9B70-DDEE-6C84308B73D1}"/>
+              </a:ext>
+            </a:extLst>
+          </p:cNvPr>
+          <p:cNvSpPr txBox="1"/>
+          <p:nvPr/>
+        </p:nvSpPr>
+        <p:spPr>
+          <a:xfrm>
+            <a:off x="6537612" y="5823579"/>
+            <a:ext cx="5174508" cy="307777"/>
+          </a:xfrm>
+          <a:prstGeom prst="rect">
+            <a:avLst/>
+          </a:prstGeom>
+          <a:noFill/>
+        </p:spPr>
+        <p:txBody>
+          <a:bodyPr wrap="square">
+            <a:spAutoFit/>
+          </a:bodyPr>
+          <a:lstStyle/>
+          <a:p>
+            <a:pPr algn="ctr"/>
+            <a:r>
+              <a:rPr lang="en-SG" sz="1400" b="1" dirty="0"/>
+              <a:t>Pi0 momentum </a:t>
+            </a:r>
+            <a:r>
+              <a:rPr lang="en-US" sz="1400" b="1" dirty="0"/>
+              <a:t>from BNB selection</a:t>
+            </a:r>
+            <a:endParaRPr lang="en-SG" sz="1400" b="1" dirty="0"/>
+          </a:p>
+        </p:txBody>
+      </p:sp>
+      <p:pic>
+        <p:nvPicPr>
+          <p:cNvPr id="14" name="Picture 13">
+            <a:extLst>
+              <a:ext uri="{FF2B5EF4-FFF2-40B4-BE49-F238E27FC236}">
+                <a16:creationId xmlns:a16="http://schemas.microsoft.com/office/drawing/2014/main" id="{1642D639-DB30-670E-10BB-E751EBD36389}"/>
+              </a:ext>
+            </a:extLst>
+          </p:cNvPr>
+          <p:cNvPicPr>
+            <a:picLocks noChangeAspect="1"/>
+          </p:cNvPicPr>
+          <p:nvPr/>
+        </p:nvPicPr>
+        <p:blipFill>
+          <a:blip r:embed="rId2"/>
+          <a:stretch>
+            <a:fillRect/>
+          </a:stretch>
+        </p:blipFill>
+        <p:spPr>
+          <a:xfrm>
+            <a:off x="6314461" y="2548822"/>
+            <a:ext cx="5267100" cy="3338475"/>
+          </a:xfrm>
+          <a:prstGeom prst="rect">
+            <a:avLst/>
+          </a:prstGeom>
+        </p:spPr>
+      </p:pic>
+      <p:pic>
+        <p:nvPicPr>
+          <p:cNvPr id="15" name="Picture 14">
+            <a:extLst>
+              <a:ext uri="{FF2B5EF4-FFF2-40B4-BE49-F238E27FC236}">
+                <a16:creationId xmlns:a16="http://schemas.microsoft.com/office/drawing/2014/main" id="{278D2A69-7DCD-32FD-53E0-DD3C3EA8AD58}"/>
+              </a:ext>
+            </a:extLst>
+          </p:cNvPr>
+          <p:cNvPicPr>
+            <a:picLocks noChangeAspect="1"/>
+          </p:cNvPicPr>
+          <p:nvPr/>
+        </p:nvPicPr>
+        <p:blipFill>
+          <a:blip r:embed="rId3"/>
+          <a:stretch>
+            <a:fillRect/>
+          </a:stretch>
+        </p:blipFill>
+        <p:spPr>
+          <a:xfrm>
+            <a:off x="610439" y="2539658"/>
+            <a:ext cx="5267100" cy="3338475"/>
+          </a:xfrm>
+          <a:prstGeom prst="rect">
+            <a:avLst/>
+          </a:prstGeom>
+        </p:spPr>
+      </p:pic>
+    </p:spTree>
+    <p:extLst>
+      <p:ext uri="{BB962C8B-B14F-4D97-AF65-F5344CB8AC3E}">
+        <p14:creationId xmlns:p14="http://schemas.microsoft.com/office/powerpoint/2010/main" val="1096324434"/>
+      </p:ext>
+    </p:extLst>
+  </p:cSld>
+  <p:clrMapOvr>
+    <a:masterClrMapping/>
+  </p:clrMapOvr>
+</p:sld>
+</file>
+
+<file path=ppt/slides/slide7.xml><?xml version="1.0" encoding="utf-8"?>
 <p:sld xmlns:a="http://schemas.openxmlformats.org/drawingml/2006/main" xmlns:r="http://schemas.openxmlformats.org/officeDocument/2006/relationships" xmlns:p="http://schemas.openxmlformats.org/presentationml/2006/main">
   <p:cSld>
     <p:spTree>
@@ -5967,7 +6544,7 @@
           <a:p>
             <a:r>
               <a:rPr lang="en-SG" b="1" dirty="0"/>
-              <a:t>Reconstructed Muon momentum (Combined)</a:t>
+              <a:t>Reconstructed Muon momentum</a:t>
             </a:r>
           </a:p>
         </p:txBody>
@@ -6002,7 +6579,15 @@
           <a:p>
             <a:r>
               <a:rPr lang="en-US" sz="1600" b="1" dirty="0"/>
-              <a:t>Plotting combined and normalized reconstructed leading muon momentum for each cumulative cut</a:t>
+              <a:t>Plotting </a:t>
+            </a:r>
+            <a:r>
+              <a:rPr lang="en-US" sz="1600" b="1" dirty="0" err="1"/>
+              <a:t>NuMI</a:t>
+            </a:r>
+            <a:r>
+              <a:rPr lang="en-US" sz="1600" b="1" dirty="0"/>
+              <a:t> and BNB normalized reconstructed leading muon momentum for each cumulative cut</a:t>
             </a:r>
             <a:endParaRPr lang="en-SG" sz="1600" dirty="0"/>
           </a:p>
@@ -6194,328 +6779,39 @@
           </a:prstGeom>
         </p:spPr>
       </p:pic>
+      <p:sp>
+        <p:nvSpPr>
+          <p:cNvPr id="3" name="Slide Number Placeholder 2">
+            <a:extLst>
+              <a:ext uri="{FF2B5EF4-FFF2-40B4-BE49-F238E27FC236}">
+                <a16:creationId xmlns:a16="http://schemas.microsoft.com/office/drawing/2014/main" id="{601162B8-811C-5BDC-90E1-B070C0E818A0}"/>
+              </a:ext>
+            </a:extLst>
+          </p:cNvPr>
+          <p:cNvSpPr>
+            <a:spLocks noGrp="1"/>
+          </p:cNvSpPr>
+          <p:nvPr>
+            <p:ph type="sldNum" sz="quarter" idx="12"/>
+          </p:nvPr>
+        </p:nvSpPr>
+        <p:spPr/>
+        <p:txBody>
+          <a:bodyPr/>
+          <a:lstStyle/>
+          <a:p>
+            <a:fld id="{BBCD8743-5A53-4A98-BC6F-5DFD6CC2F469}" type="slidenum">
+              <a:rPr lang="en-SG" smtClean="0"/>
+              <a:t>7</a:t>
+            </a:fld>
+            <a:endParaRPr lang="en-SG"/>
+          </a:p>
+        </p:txBody>
+      </p:sp>
     </p:spTree>
     <p:extLst>
       <p:ext uri="{BB962C8B-B14F-4D97-AF65-F5344CB8AC3E}">
-        <p14:creationId xmlns:p14="http://schemas.microsoft.com/office/powerpoint/2010/main" val="532125469"/>
-      </p:ext>
-    </p:extLst>
-  </p:cSld>
-  <p:clrMapOvr>
-    <a:masterClrMapping/>
-  </p:clrMapOvr>
-</p:sld>
-</file>
-
-<file path=ppt/slides/slide6.xml><?xml version="1.0" encoding="utf-8"?>
-<p:sld xmlns:a="http://schemas.openxmlformats.org/drawingml/2006/main" xmlns:r="http://schemas.openxmlformats.org/officeDocument/2006/relationships" xmlns:p="http://schemas.openxmlformats.org/presentationml/2006/main">
-  <p:cSld>
-    <p:spTree>
-      <p:nvGrpSpPr>
-        <p:cNvPr id="1" name="">
-          <a:extLst>
-            <a:ext uri="{FF2B5EF4-FFF2-40B4-BE49-F238E27FC236}">
-              <a16:creationId xmlns:a16="http://schemas.microsoft.com/office/drawing/2014/main" id="{F42A6885-7AB1-F768-C6CC-453BB0149C4D}"/>
-            </a:ext>
-          </a:extLst>
-        </p:cNvPr>
-        <p:cNvGrpSpPr/>
-        <p:nvPr/>
-      </p:nvGrpSpPr>
-      <p:grpSpPr>
-        <a:xfrm>
-          <a:off x="0" y="0"/>
-          <a:ext cx="0" cy="0"/>
-          <a:chOff x="0" y="0"/>
-          <a:chExt cx="0" cy="0"/>
-        </a:xfrm>
-      </p:grpSpPr>
-      <p:sp>
-        <p:nvSpPr>
-          <p:cNvPr id="2" name="Title 1">
-            <a:extLst>
-              <a:ext uri="{FF2B5EF4-FFF2-40B4-BE49-F238E27FC236}">
-                <a16:creationId xmlns:a16="http://schemas.microsoft.com/office/drawing/2014/main" id="{420FE290-B3D9-7973-EEA1-863F8DDD7886}"/>
-              </a:ext>
-            </a:extLst>
-          </p:cNvPr>
-          <p:cNvSpPr>
-            <a:spLocks noGrp="1"/>
-          </p:cNvSpPr>
-          <p:nvPr>
-            <p:ph type="title"/>
-          </p:nvPr>
-        </p:nvSpPr>
-        <p:spPr/>
-        <p:txBody>
-          <a:bodyPr/>
-          <a:lstStyle/>
-          <a:p>
-            <a:r>
-              <a:rPr lang="en-SG" b="1" dirty="0"/>
-              <a:t>Muon momentum</a:t>
-            </a:r>
-          </a:p>
-        </p:txBody>
-      </p:sp>
-      <p:sp>
-        <p:nvSpPr>
-          <p:cNvPr id="4" name="TextBox 3">
-            <a:extLst>
-              <a:ext uri="{FF2B5EF4-FFF2-40B4-BE49-F238E27FC236}">
-                <a16:creationId xmlns:a16="http://schemas.microsoft.com/office/drawing/2014/main" id="{9E4E4DC2-F9EC-5DEC-DFA4-868F1CC8C334}"/>
-              </a:ext>
-            </a:extLst>
-          </p:cNvPr>
-          <p:cNvSpPr txBox="1"/>
-          <p:nvPr/>
-        </p:nvSpPr>
-        <p:spPr>
-          <a:xfrm>
-            <a:off x="1051098" y="1815053"/>
-            <a:ext cx="10399395" cy="830997"/>
-          </a:xfrm>
-          <a:prstGeom prst="rect">
-            <a:avLst/>
-          </a:prstGeom>
-          <a:noFill/>
-        </p:spPr>
-        <p:txBody>
-          <a:bodyPr wrap="square">
-            <a:spAutoFit/>
-          </a:bodyPr>
-          <a:lstStyle/>
-          <a:p>
-            <a:r>
-              <a:rPr lang="en-US" sz="1600" b="1" dirty="0"/>
-              <a:t>Overlapping </a:t>
-            </a:r>
-            <a:r>
-              <a:rPr lang="en-US" sz="1600" b="1" dirty="0" err="1"/>
-              <a:t>NuMI</a:t>
-            </a:r>
-            <a:r>
-              <a:rPr lang="en-US" sz="1600" b="1" dirty="0"/>
-              <a:t> and BNB reconstructed and true leading muon momentum after final selection (with same binning)  </a:t>
-            </a:r>
-            <a:endParaRPr lang="en-SG" sz="1600" dirty="0"/>
-          </a:p>
-          <a:p>
-            <a:endParaRPr lang="en-SG" sz="1600" b="1" dirty="0"/>
-          </a:p>
-          <a:p>
-            <a:endParaRPr lang="en-SG" sz="1600" b="1" dirty="0"/>
-          </a:p>
-        </p:txBody>
-      </p:sp>
-      <p:pic>
-        <p:nvPicPr>
-          <p:cNvPr id="6" name="Picture 5">
-            <a:extLst>
-              <a:ext uri="{FF2B5EF4-FFF2-40B4-BE49-F238E27FC236}">
-                <a16:creationId xmlns:a16="http://schemas.microsoft.com/office/drawing/2014/main" id="{557A2630-C691-D11D-766B-961077F55B53}"/>
-              </a:ext>
-            </a:extLst>
-          </p:cNvPr>
-          <p:cNvPicPr>
-            <a:picLocks noChangeAspect="1"/>
-          </p:cNvPicPr>
-          <p:nvPr/>
-        </p:nvPicPr>
-        <p:blipFill>
-          <a:blip r:embed="rId2"/>
-          <a:stretch>
-            <a:fillRect/>
-          </a:stretch>
-        </p:blipFill>
-        <p:spPr>
-          <a:xfrm>
-            <a:off x="352127" y="2517932"/>
-            <a:ext cx="5239999" cy="3388037"/>
-          </a:xfrm>
-          <a:prstGeom prst="rect">
-            <a:avLst/>
-          </a:prstGeom>
-        </p:spPr>
-      </p:pic>
-      <p:pic>
-        <p:nvPicPr>
-          <p:cNvPr id="9" name="Picture 8">
-            <a:extLst>
-              <a:ext uri="{FF2B5EF4-FFF2-40B4-BE49-F238E27FC236}">
-                <a16:creationId xmlns:a16="http://schemas.microsoft.com/office/drawing/2014/main" id="{6779F066-E2BC-8CFB-CE47-007B19600F22}"/>
-              </a:ext>
-            </a:extLst>
-          </p:cNvPr>
-          <p:cNvPicPr>
-            <a:picLocks noChangeAspect="1"/>
-          </p:cNvPicPr>
-          <p:nvPr/>
-        </p:nvPicPr>
-        <p:blipFill>
-          <a:blip r:embed="rId3"/>
-          <a:stretch>
-            <a:fillRect/>
-          </a:stretch>
-        </p:blipFill>
-        <p:spPr>
-          <a:xfrm>
-            <a:off x="6599876" y="2517932"/>
-            <a:ext cx="5239999" cy="3388037"/>
-          </a:xfrm>
-          <a:prstGeom prst="rect">
-            <a:avLst/>
-          </a:prstGeom>
-        </p:spPr>
-      </p:pic>
-    </p:spTree>
-    <p:extLst>
-      <p:ext uri="{BB962C8B-B14F-4D97-AF65-F5344CB8AC3E}">
-        <p14:creationId xmlns:p14="http://schemas.microsoft.com/office/powerpoint/2010/main" val="1379496366"/>
-      </p:ext>
-    </p:extLst>
-  </p:cSld>
-  <p:clrMapOvr>
-    <a:masterClrMapping/>
-  </p:clrMapOvr>
-</p:sld>
-</file>
-
-<file path=ppt/slides/slide7.xml><?xml version="1.0" encoding="utf-8"?>
-<p:sld xmlns:a="http://schemas.openxmlformats.org/drawingml/2006/main" xmlns:r="http://schemas.openxmlformats.org/officeDocument/2006/relationships" xmlns:p="http://schemas.openxmlformats.org/presentationml/2006/main">
-  <p:cSld>
-    <p:spTree>
-      <p:nvGrpSpPr>
-        <p:cNvPr id="1" name="">
-          <a:extLst>
-            <a:ext uri="{FF2B5EF4-FFF2-40B4-BE49-F238E27FC236}">
-              <a16:creationId xmlns:a16="http://schemas.microsoft.com/office/drawing/2014/main" id="{BCA4B177-E778-E947-077C-98696B3FD7F3}"/>
-            </a:ext>
-          </a:extLst>
-        </p:cNvPr>
-        <p:cNvGrpSpPr/>
-        <p:nvPr/>
-      </p:nvGrpSpPr>
-      <p:grpSpPr>
-        <a:xfrm>
-          <a:off x="0" y="0"/>
-          <a:ext cx="0" cy="0"/>
-          <a:chOff x="0" y="0"/>
-          <a:chExt cx="0" cy="0"/>
-        </a:xfrm>
-      </p:grpSpPr>
-      <p:sp>
-        <p:nvSpPr>
-          <p:cNvPr id="2" name="Title 1">
-            <a:extLst>
-              <a:ext uri="{FF2B5EF4-FFF2-40B4-BE49-F238E27FC236}">
-                <a16:creationId xmlns:a16="http://schemas.microsoft.com/office/drawing/2014/main" id="{97DA368B-7750-3B22-1AC8-3E7A219B7BA4}"/>
-              </a:ext>
-            </a:extLst>
-          </p:cNvPr>
-          <p:cNvSpPr>
-            <a:spLocks noGrp="1"/>
-          </p:cNvSpPr>
-          <p:nvPr>
-            <p:ph type="title"/>
-          </p:nvPr>
-        </p:nvSpPr>
-        <p:spPr/>
-        <p:txBody>
-          <a:bodyPr/>
-          <a:lstStyle/>
-          <a:p>
-            <a:r>
-              <a:rPr lang="en-SG" b="1" dirty="0"/>
-              <a:t>Muon length</a:t>
-            </a:r>
-          </a:p>
-        </p:txBody>
-      </p:sp>
-      <p:pic>
-        <p:nvPicPr>
-          <p:cNvPr id="8" name="Picture 7">
-            <a:extLst>
-              <a:ext uri="{FF2B5EF4-FFF2-40B4-BE49-F238E27FC236}">
-                <a16:creationId xmlns:a16="http://schemas.microsoft.com/office/drawing/2014/main" id="{A61BE07D-FB97-8518-9F94-FC272506092C}"/>
-              </a:ext>
-            </a:extLst>
-          </p:cNvPr>
-          <p:cNvPicPr>
-            <a:picLocks noChangeAspect="1"/>
-          </p:cNvPicPr>
-          <p:nvPr/>
-        </p:nvPicPr>
-        <p:blipFill>
-          <a:blip r:embed="rId2"/>
-          <a:stretch>
-            <a:fillRect/>
-          </a:stretch>
-        </p:blipFill>
-        <p:spPr>
-          <a:xfrm>
-            <a:off x="3019425" y="2323736"/>
-            <a:ext cx="6153150" cy="3959733"/>
-          </a:xfrm>
-          <a:prstGeom prst="rect">
-            <a:avLst/>
-          </a:prstGeom>
-        </p:spPr>
-      </p:pic>
-      <p:sp>
-        <p:nvSpPr>
-          <p:cNvPr id="12" name="TextBox 11">
-            <a:extLst>
-              <a:ext uri="{FF2B5EF4-FFF2-40B4-BE49-F238E27FC236}">
-                <a16:creationId xmlns:a16="http://schemas.microsoft.com/office/drawing/2014/main" id="{97EECA04-BC73-E272-8492-BA87C3AD5DAC}"/>
-              </a:ext>
-            </a:extLst>
-          </p:cNvPr>
-          <p:cNvSpPr txBox="1"/>
-          <p:nvPr/>
-        </p:nvSpPr>
-        <p:spPr>
-          <a:xfrm>
-            <a:off x="1051098" y="1815053"/>
-            <a:ext cx="10399395" cy="830997"/>
-          </a:xfrm>
-          <a:prstGeom prst="rect">
-            <a:avLst/>
-          </a:prstGeom>
-          <a:noFill/>
-        </p:spPr>
-        <p:txBody>
-          <a:bodyPr wrap="square">
-            <a:spAutoFit/>
-          </a:bodyPr>
-          <a:lstStyle/>
-          <a:p>
-            <a:r>
-              <a:rPr lang="en-US" sz="1600" b="1" dirty="0"/>
-              <a:t>Overlapping </a:t>
-            </a:r>
-            <a:r>
-              <a:rPr lang="en-US" sz="1600" b="1" dirty="0" err="1"/>
-              <a:t>NuMI</a:t>
-            </a:r>
-            <a:r>
-              <a:rPr lang="en-US" sz="1600" b="1" dirty="0"/>
-              <a:t> and BNB reconstructed leading muon momentum  </a:t>
-            </a:r>
-            <a:endParaRPr lang="en-SG" sz="1600" dirty="0"/>
-          </a:p>
-          <a:p>
-            <a:endParaRPr lang="en-SG" sz="1600" b="1" dirty="0"/>
-          </a:p>
-          <a:p>
-            <a:endParaRPr lang="en-SG" sz="1600" b="1" dirty="0"/>
-          </a:p>
-        </p:txBody>
-      </p:sp>
-    </p:spTree>
-    <p:extLst>
-      <p:ext uri="{BB962C8B-B14F-4D97-AF65-F5344CB8AC3E}">
-        <p14:creationId xmlns:p14="http://schemas.microsoft.com/office/powerpoint/2010/main" val="1789436782"/>
+        <p14:creationId xmlns:p14="http://schemas.microsoft.com/office/powerpoint/2010/main" val="3277853499"/>
       </p:ext>
     </p:extLst>
   </p:cSld>
@@ -6623,7 +6919,7 @@
         <p:cNvPr id="1" name="">
           <a:extLst>
             <a:ext uri="{FF2B5EF4-FFF2-40B4-BE49-F238E27FC236}">
-              <a16:creationId xmlns:a16="http://schemas.microsoft.com/office/drawing/2014/main" id="{06F195C7-29A4-5998-E205-E52CCBB5B12E}"/>
+              <a16:creationId xmlns:a16="http://schemas.microsoft.com/office/drawing/2014/main" id="{7301ED0C-0E09-39DC-ABAB-3F22FC19CC01}"/>
             </a:ext>
           </a:extLst>
         </p:cNvPr>
@@ -6643,7 +6939,7 @@
           <p:cNvPr id="2" name="Title 1">
             <a:extLst>
               <a:ext uri="{FF2B5EF4-FFF2-40B4-BE49-F238E27FC236}">
-                <a16:creationId xmlns:a16="http://schemas.microsoft.com/office/drawing/2014/main" id="{D26EAD3F-9A85-9DA8-590B-A7A4C1284BE4}"/>
+                <a16:creationId xmlns:a16="http://schemas.microsoft.com/office/drawing/2014/main" id="{7FF4865C-6C33-21D7-994A-44BA21E96D4C}"/>
               </a:ext>
             </a:extLst>
           </p:cNvPr>
@@ -6661,15 +6957,7 @@
           <a:p>
             <a:r>
               <a:rPr lang="en-SG" b="1" dirty="0"/>
-              <a:t>True Muon momentum (</a:t>
-            </a:r>
-            <a:r>
-              <a:rPr lang="en-SG" b="1" dirty="0" err="1"/>
-              <a:t>NuMI</a:t>
-            </a:r>
-            <a:r>
-              <a:rPr lang="en-SG" b="1" dirty="0"/>
-              <a:t>)</a:t>
+              <a:t>True Muon momentum </a:t>
             </a:r>
           </a:p>
         </p:txBody>
@@ -6679,7 +6967,7 @@
           <p:cNvPr id="4" name="TextBox 3">
             <a:extLst>
               <a:ext uri="{FF2B5EF4-FFF2-40B4-BE49-F238E27FC236}">
-                <a16:creationId xmlns:a16="http://schemas.microsoft.com/office/drawing/2014/main" id="{3C53FBB0-D782-3582-883B-A1BDEA26D0FA}"/>
+                <a16:creationId xmlns:a16="http://schemas.microsoft.com/office/drawing/2014/main" id="{1D78F462-D5C9-BEAC-248C-66861DA20B39}"/>
               </a:ext>
             </a:extLst>
           </p:cNvPr>
@@ -6712,7 +7000,7 @@
             </a:r>
             <a:r>
               <a:rPr lang="en-US" sz="1600" b="1" dirty="0"/>
-              <a:t> sample reconstructed leading muon momentum for each cumulative cut</a:t>
+              <a:t> and BNB combined and normalized reconstructed leading muon momentum for each cumulative cut</a:t>
             </a:r>
             <a:endParaRPr lang="en-SG" sz="1600" dirty="0"/>
           </a:p>
@@ -6729,7 +7017,7 @@
           <p:cNvPr id="6" name="Picture 5">
             <a:extLst>
               <a:ext uri="{FF2B5EF4-FFF2-40B4-BE49-F238E27FC236}">
-                <a16:creationId xmlns:a16="http://schemas.microsoft.com/office/drawing/2014/main" id="{E4133542-824D-6840-C1FF-9F75CCD0D3AB}"/>
+                <a16:creationId xmlns:a16="http://schemas.microsoft.com/office/drawing/2014/main" id="{C3FAEC80-2D5D-1E0C-9EEC-E0512A0DD3B6}"/>
               </a:ext>
             </a:extLst>
           </p:cNvPr>
@@ -6746,8 +7034,8 @@
         </p:blipFill>
         <p:spPr>
           <a:xfrm>
-            <a:off x="695325" y="2292767"/>
-            <a:ext cx="3587882" cy="1935475"/>
+            <a:off x="485437" y="2259296"/>
+            <a:ext cx="3619728" cy="1978013"/>
           </a:xfrm>
           <a:prstGeom prst="rect">
             <a:avLst/>
@@ -6759,7 +7047,7 @@
           <p:cNvPr id="9" name="Picture 8">
             <a:extLst>
               <a:ext uri="{FF2B5EF4-FFF2-40B4-BE49-F238E27FC236}">
-                <a16:creationId xmlns:a16="http://schemas.microsoft.com/office/drawing/2014/main" id="{E7F814A0-B4FC-DAC6-6FC3-B28FA364FF48}"/>
+                <a16:creationId xmlns:a16="http://schemas.microsoft.com/office/drawing/2014/main" id="{CF5A8666-76B8-7C12-E5CC-0169955A4B6A}"/>
               </a:ext>
             </a:extLst>
           </p:cNvPr>
@@ -6776,8 +7064,8 @@
         </p:blipFill>
         <p:spPr>
           <a:xfrm>
-            <a:off x="4283208" y="2284100"/>
-            <a:ext cx="3587882" cy="1935475"/>
+            <a:off x="4283208" y="2230551"/>
+            <a:ext cx="3619728" cy="1978013"/>
           </a:xfrm>
           <a:prstGeom prst="rect">
             <a:avLst/>
@@ -6789,7 +7077,7 @@
           <p:cNvPr id="12" name="Picture 11">
             <a:extLst>
               <a:ext uri="{FF2B5EF4-FFF2-40B4-BE49-F238E27FC236}">
-                <a16:creationId xmlns:a16="http://schemas.microsoft.com/office/drawing/2014/main" id="{3B5DAF9F-8853-52AD-7C50-6144495BB82F}"/>
+                <a16:creationId xmlns:a16="http://schemas.microsoft.com/office/drawing/2014/main" id="{4F534882-62C4-4D5E-80A3-9514F496C095}"/>
               </a:ext>
             </a:extLst>
           </p:cNvPr>
@@ -6806,8 +7094,8 @@
         </p:blipFill>
         <p:spPr>
           <a:xfrm>
-            <a:off x="7871091" y="2275433"/>
-            <a:ext cx="3587882" cy="1935475"/>
+            <a:off x="8086834" y="2259295"/>
+            <a:ext cx="3619729" cy="1978014"/>
           </a:xfrm>
           <a:prstGeom prst="rect">
             <a:avLst/>
@@ -6819,7 +7107,7 @@
           <p:cNvPr id="15" name="Picture 14">
             <a:extLst>
               <a:ext uri="{FF2B5EF4-FFF2-40B4-BE49-F238E27FC236}">
-                <a16:creationId xmlns:a16="http://schemas.microsoft.com/office/drawing/2014/main" id="{2ABD7D92-60C8-3F44-0AC8-A46D31FF02F8}"/>
+                <a16:creationId xmlns:a16="http://schemas.microsoft.com/office/drawing/2014/main" id="{70F5C46E-0BD5-95B9-B688-9D269606AF28}"/>
               </a:ext>
             </a:extLst>
           </p:cNvPr>
@@ -6836,8 +7124,8 @@
         </p:blipFill>
         <p:spPr>
           <a:xfrm>
-            <a:off x="695325" y="4297778"/>
-            <a:ext cx="3587882" cy="1935475"/>
+            <a:off x="485437" y="4280290"/>
+            <a:ext cx="3619728" cy="1978013"/>
           </a:xfrm>
           <a:prstGeom prst="rect">
             <a:avLst/>
@@ -6846,10 +7134,10 @@
       </p:pic>
       <p:pic>
         <p:nvPicPr>
-          <p:cNvPr id="21" name="Picture 20">
+          <p:cNvPr id="18" name="Picture 17">
             <a:extLst>
               <a:ext uri="{FF2B5EF4-FFF2-40B4-BE49-F238E27FC236}">
-                <a16:creationId xmlns:a16="http://schemas.microsoft.com/office/drawing/2014/main" id="{FC481859-428E-78FF-FD21-C49ED1C24F3B}"/>
+                <a16:creationId xmlns:a16="http://schemas.microsoft.com/office/drawing/2014/main" id="{BFE28F31-909D-413F-26EB-0271008A0E2F}"/>
               </a:ext>
             </a:extLst>
           </p:cNvPr>
@@ -6866,8 +7154,8 @@
         </p:blipFill>
         <p:spPr>
           <a:xfrm>
-            <a:off x="4283207" y="4297778"/>
-            <a:ext cx="3587882" cy="1952807"/>
+            <a:off x="4285878" y="4280289"/>
+            <a:ext cx="3681203" cy="1978014"/>
           </a:xfrm>
           <a:prstGeom prst="rect">
             <a:avLst/>
@@ -6876,10 +7164,10 @@
       </p:pic>
       <p:pic>
         <p:nvPicPr>
-          <p:cNvPr id="23" name="Picture 22">
+          <p:cNvPr id="21" name="Picture 20">
             <a:extLst>
               <a:ext uri="{FF2B5EF4-FFF2-40B4-BE49-F238E27FC236}">
-                <a16:creationId xmlns:a16="http://schemas.microsoft.com/office/drawing/2014/main" id="{7CB483D7-7E6D-B947-069C-1D90E801A49A}"/>
+                <a16:creationId xmlns:a16="http://schemas.microsoft.com/office/drawing/2014/main" id="{384F915B-E0B5-D474-E1E4-764D3F3BFA64}"/>
               </a:ext>
             </a:extLst>
           </p:cNvPr>
@@ -6896,18 +7184,47 @@
         </p:blipFill>
         <p:spPr>
           <a:xfrm>
-            <a:off x="7871089" y="4297778"/>
-            <a:ext cx="3587882" cy="1952807"/>
+            <a:off x="7967081" y="4280289"/>
+            <a:ext cx="4031967" cy="1978014"/>
           </a:xfrm>
           <a:prstGeom prst="rect">
             <a:avLst/>
           </a:prstGeom>
         </p:spPr>
       </p:pic>
+      <p:sp>
+        <p:nvSpPr>
+          <p:cNvPr id="3" name="Slide Number Placeholder 2">
+            <a:extLst>
+              <a:ext uri="{FF2B5EF4-FFF2-40B4-BE49-F238E27FC236}">
+                <a16:creationId xmlns:a16="http://schemas.microsoft.com/office/drawing/2014/main" id="{E60C8316-0EF6-961F-4ACB-E365DE0F2DE3}"/>
+              </a:ext>
+            </a:extLst>
+          </p:cNvPr>
+          <p:cNvSpPr>
+            <a:spLocks noGrp="1"/>
+          </p:cNvSpPr>
+          <p:nvPr>
+            <p:ph type="sldNum" sz="quarter" idx="12"/>
+          </p:nvPr>
+        </p:nvSpPr>
+        <p:spPr/>
+        <p:txBody>
+          <a:bodyPr/>
+          <a:lstStyle/>
+          <a:p>
+            <a:fld id="{BBCD8743-5A53-4A98-BC6F-5DFD6CC2F469}" type="slidenum">
+              <a:rPr lang="en-SG" smtClean="0"/>
+              <a:t>9</a:t>
+            </a:fld>
+            <a:endParaRPr lang="en-SG"/>
+          </a:p>
+        </p:txBody>
+      </p:sp>
     </p:spTree>
     <p:extLst>
       <p:ext uri="{BB962C8B-B14F-4D97-AF65-F5344CB8AC3E}">
-        <p14:creationId xmlns:p14="http://schemas.microsoft.com/office/powerpoint/2010/main" val="771120587"/>
+        <p14:creationId xmlns:p14="http://schemas.microsoft.com/office/powerpoint/2010/main" val="4204204842"/>
       </p:ext>
     </p:extLst>
   </p:cSld>
